--- a/08-materiais/modelos/cartao-descoberta-prototipo.pptx
+++ b/08-materiais/modelos/cartao-descoberta-prototipo.pptx
@@ -972,7 +972,7 @@
         </p:nvSpPr>
         <p:spPr>
           <a:xfrm>
-            <a:off x="566928" y="384048"/>
+            <a:off x="530352" y="347472"/>
             <a:ext cx="1828800" cy="237744"/>
           </a:xfrm>
           <a:prstGeom prst="rect">
@@ -1011,24 +1011,24 @@
         </p:nvSpPr>
         <p:spPr>
           <a:xfrm>
-            <a:off x="566928" y="658368"/>
-            <a:ext cx="6428232" cy="201168"/>
-          </a:xfrm>
-          <a:prstGeom prst="rect">
-            <a:avLst/>
-          </a:prstGeom>
-          <a:noFill/>
-          <a:ln/>
-        </p:spPr>
-        <p:txBody>
-          <a:bodyPr wrap="square" lIns="0" tIns="0" rIns="0" bIns="0" rtlCol="0" anchor="ctr"/>
-          <a:lstStyle/>
-          <a:p>
-            <a:pPr indent="0" marL="0">
-              <a:buNone/>
-            </a:pPr>
-            <a:r>
-              <a:rPr lang="en-US" sz="850" b="1" spc="260" kern="0" dirty="0">
+            <a:off x="530352" y="603504"/>
+            <a:ext cx="6501384" cy="201168"/>
+          </a:xfrm>
+          <a:prstGeom prst="rect">
+            <a:avLst/>
+          </a:prstGeom>
+          <a:noFill/>
+          <a:ln/>
+        </p:spPr>
+        <p:txBody>
+          <a:bodyPr wrap="square" lIns="0" tIns="0" rIns="0" bIns="0" rtlCol="0" anchor="ctr"/>
+          <a:lstStyle/>
+          <a:p>
+            <a:pPr indent="0" marL="0">
+              <a:buNone/>
+            </a:pPr>
+            <a:r>
+              <a:rPr lang="en-US" sz="850" b="1" spc="240" kern="0" dirty="0">
                 <a:solidFill>
                   <a:srgbClr val="B8985A"/>
                 </a:solidFill>
@@ -1036,7 +1036,7 @@
                 <a:ea typeface="Calibri" pitchFamily="34" charset="-122"/>
                 <a:cs typeface="Calibri" pitchFamily="34" charset="-120"/>
               </a:rPr>
-              <a:t>CARTÃO DE REUNIÃO · DESCOBERTA TÉCNICA DO PROTÓTIPO</a:t>
+              <a:t>CARTÃO DE REUNIÃO · DESCOBERTA TÉCNICA DO PROTÓTIPO · 7 BLOCOS, ~60 MIN</a:t>
             </a:r>
             <a:endParaRPr lang="en-US" sz="850" dirty="0"/>
           </a:p>
@@ -1050,24 +1050,24 @@
         </p:nvSpPr>
         <p:spPr>
           <a:xfrm>
-            <a:off x="566928" y="896112"/>
-            <a:ext cx="6428232" cy="310896"/>
-          </a:xfrm>
-          <a:prstGeom prst="rect">
-            <a:avLst/>
-          </a:prstGeom>
-          <a:noFill/>
-          <a:ln/>
-        </p:spPr>
-        <p:txBody>
-          <a:bodyPr wrap="square" lIns="0" tIns="0" rIns="0" bIns="0" rtlCol="0" anchor="ctr"/>
-          <a:lstStyle/>
-          <a:p>
-            <a:pPr indent="0" marL="0">
-              <a:buNone/>
-            </a:pPr>
-            <a:r>
-              <a:rPr lang="en-US" sz="1600" b="1" dirty="0">
+            <a:off x="530352" y="822960"/>
+            <a:ext cx="6501384" cy="292608"/>
+          </a:xfrm>
+          <a:prstGeom prst="rect">
+            <a:avLst/>
+          </a:prstGeom>
+          <a:noFill/>
+          <a:ln/>
+        </p:spPr>
+        <p:txBody>
+          <a:bodyPr wrap="square" lIns="0" tIns="0" rIns="0" bIns="0" rtlCol="0" anchor="ctr"/>
+          <a:lstStyle/>
+          <a:p>
+            <a:pPr indent="0" marL="0">
+              <a:buNone/>
+            </a:pPr>
+            <a:r>
+              <a:rPr lang="en-US" sz="1550" b="1" dirty="0">
                 <a:solidFill>
                   <a:srgbClr val="1B2A4A"/>
                 </a:solidFill>
@@ -1077,7 +1077,7 @@
               </a:rPr>
               <a:t>Sair daqui com o protótipo desenhável.</a:t>
             </a:r>
-            <a:endParaRPr lang="en-US" sz="1600" dirty="0"/>
+            <a:endParaRPr lang="en-US" sz="1550" dirty="0"/>
           </a:p>
         </p:txBody>
       </p:sp>
@@ -1089,8 +1089,8 @@
         </p:nvSpPr>
         <p:spPr>
           <a:xfrm>
-            <a:off x="566928" y="1316736"/>
-            <a:ext cx="6428232" cy="566928"/>
+            <a:off x="530352" y="1188720"/>
+            <a:ext cx="6501384" cy="530352"/>
           </a:xfrm>
           <a:prstGeom prst="rect">
             <a:avLst/>
@@ -1109,27 +1109,27 @@
         </p:nvSpPr>
         <p:spPr>
           <a:xfrm>
-            <a:off x="768096" y="1399032"/>
-            <a:ext cx="6025896" cy="420624"/>
-          </a:xfrm>
-          <a:prstGeom prst="rect">
-            <a:avLst/>
-          </a:prstGeom>
-          <a:noFill/>
-          <a:ln/>
-        </p:spPr>
-        <p:txBody>
-          <a:bodyPr wrap="square" lIns="0" tIns="0" rIns="0" bIns="0" rtlCol="0" anchor="ctr"/>
-          <a:lstStyle/>
-          <a:p>
-            <a:pPr indent="0" marL="0">
-              <a:lnSpc>
-                <a:spcPts val="1250"/>
-              </a:lnSpc>
-              <a:buNone/>
-            </a:pPr>
-            <a:r>
-              <a:rPr lang="en-US" sz="950" i="1" dirty="0">
+            <a:off x="713232" y="1261872"/>
+            <a:ext cx="6135624" cy="402336"/>
+          </a:xfrm>
+          <a:prstGeom prst="rect">
+            <a:avLst/>
+          </a:prstGeom>
+          <a:noFill/>
+          <a:ln/>
+        </p:spPr>
+        <p:txBody>
+          <a:bodyPr wrap="square" lIns="0" tIns="0" rIns="0" bIns="0" rtlCol="0" anchor="ctr"/>
+          <a:lstStyle/>
+          <a:p>
+            <a:pPr indent="0" marL="0">
+              <a:lnSpc>
+                <a:spcPts val="1200"/>
+              </a:lnSpc>
+              <a:buNone/>
+            </a:pPr>
+            <a:r>
+              <a:rPr lang="en-US" sz="900" i="1" dirty="0">
                 <a:solidFill>
                   <a:srgbClr val="1B2A4A"/>
                 </a:solidFill>
@@ -1139,7 +1139,7 @@
               </a:rPr>
               <a:t>“Hoje o meu papel é entender o problema a fundo — vou fazer bastante pergunta, algumas bem básicas. É de propósito: o nosso time de engenharia desenha o protótipo em cima do que eu levar daqui.”</a:t>
             </a:r>
-            <a:endParaRPr lang="en-US" sz="950" dirty="0"/>
+            <a:endParaRPr lang="en-US" sz="900" dirty="0"/>
           </a:p>
         </p:txBody>
       </p:sp>
@@ -1151,24 +1151,24 @@
         </p:nvSpPr>
         <p:spPr>
           <a:xfrm>
-            <a:off x="566928" y="1956816"/>
-            <a:ext cx="6428232" cy="201168"/>
-          </a:xfrm>
-          <a:prstGeom prst="rect">
-            <a:avLst/>
-          </a:prstGeom>
-          <a:noFill/>
-          <a:ln/>
-        </p:spPr>
-        <p:txBody>
-          <a:bodyPr wrap="square" lIns="0" tIns="0" rIns="0" bIns="0" rtlCol="0" anchor="ctr"/>
-          <a:lstStyle/>
-          <a:p>
-            <a:pPr indent="0" marL="0">
-              <a:buNone/>
-            </a:pPr>
-            <a:r>
-              <a:rPr lang="en-US" sz="850" b="1" dirty="0">
+            <a:off x="530352" y="1783080"/>
+            <a:ext cx="6501384" cy="201168"/>
+          </a:xfrm>
+          <a:prstGeom prst="rect">
+            <a:avLst/>
+          </a:prstGeom>
+          <a:noFill/>
+          <a:ln/>
+        </p:spPr>
+        <p:txBody>
+          <a:bodyPr wrap="square" lIns="0" tIns="0" rIns="0" bIns="0" rtlCol="0" anchor="ctr"/>
+          <a:lstStyle/>
+          <a:p>
+            <a:pPr indent="0" marL="0">
+              <a:buNone/>
+            </a:pPr>
+            <a:r>
+              <a:rPr lang="en-US" sz="820" b="1" dirty="0">
                 <a:solidFill>
                   <a:srgbClr val="B8985A"/>
                 </a:solidFill>
@@ -1176,9 +1176,9 @@
                 <a:ea typeface="Calibri" pitchFamily="34" charset="-122"/>
                 <a:cs typeface="Calibri" pitchFamily="34" charset="-120"/>
               </a:rPr>
-              <a:t>Regra de ouro: pedir para MOSTRAREM, não só contarem. Anotar todo nome próprio: sistema, tela, campo, relatório.</a:t>
-            </a:r>
-            <a:endParaRPr lang="en-US" sz="850" dirty="0"/>
+              <a:t>Ouro: pedir para MOSTRAREM · anotar todo nome próprio (sistema, tela, campo) · nunca prometer prazo ou arquitetura na hora.</a:t>
+            </a:r>
+            <a:endParaRPr lang="en-US" sz="820" dirty="0"/>
           </a:p>
         </p:txBody>
       </p:sp>
@@ -1190,7 +1190,7 @@
         </p:nvSpPr>
         <p:spPr>
           <a:xfrm>
-            <a:off x="521208" y="2231136"/>
+            <a:off x="484632" y="2048256"/>
             <a:ext cx="457200" cy="457200"/>
           </a:xfrm>
           <a:prstGeom prst="rect">
@@ -1207,7 +1207,7 @@
               <a:buNone/>
             </a:pPr>
             <a:r>
-              <a:rPr lang="en-US" sz="2100" b="1" dirty="0">
+              <a:rPr lang="en-US" sz="2000" b="1" dirty="0">
                 <a:solidFill>
                   <a:srgbClr val="B8985A"/>
                 </a:solidFill>
@@ -1217,7 +1217,7 @@
               </a:rPr>
               <a:t>1</a:t>
             </a:r>
-            <a:endParaRPr lang="en-US" sz="2100" dirty="0"/>
+            <a:endParaRPr lang="en-US" sz="2000" dirty="0"/>
           </a:p>
         </p:txBody>
       </p:sp>
@@ -1229,24 +1229,24 @@
         </p:nvSpPr>
         <p:spPr>
           <a:xfrm>
-            <a:off x="1024128" y="2286000"/>
-            <a:ext cx="5971032" cy="237744"/>
-          </a:xfrm>
-          <a:prstGeom prst="rect">
-            <a:avLst/>
-          </a:prstGeom>
-          <a:noFill/>
-          <a:ln/>
-        </p:spPr>
-        <p:txBody>
-          <a:bodyPr wrap="square" lIns="0" tIns="0" rIns="0" bIns="0" rtlCol="0" anchor="ctr"/>
-          <a:lstStyle/>
-          <a:p>
-            <a:pPr indent="0" marL="0">
-              <a:buNone/>
-            </a:pPr>
-            <a:r>
-              <a:rPr lang="en-US" sz="1250" b="1" dirty="0">
+            <a:off x="950976" y="2103120"/>
+            <a:ext cx="6080760" cy="228600"/>
+          </a:xfrm>
+          <a:prstGeom prst="rect">
+            <a:avLst/>
+          </a:prstGeom>
+          <a:noFill/>
+          <a:ln/>
+        </p:spPr>
+        <p:txBody>
+          <a:bodyPr wrap="square" lIns="0" tIns="0" rIns="0" bIns="0" rtlCol="0" anchor="ctr"/>
+          <a:lstStyle/>
+          <a:p>
+            <a:pPr indent="0" marL="0">
+              <a:buNone/>
+            </a:pPr>
+            <a:r>
+              <a:rPr lang="en-US" sz="1200" b="1" dirty="0">
                 <a:solidFill>
                   <a:srgbClr val="1B2A4A"/>
                 </a:solidFill>
@@ -1260,7 +1260,7 @@
               <a:buNone/>
             </a:pPr>
             <a:r>
-              <a:rPr lang="en-US" sz="850" dirty="0">
+              <a:rPr lang="en-US" sz="800" dirty="0">
                 <a:solidFill>
                   <a:srgbClr val="5A6472"/>
                 </a:solidFill>
@@ -1268,9 +1268,9 @@
                 <a:ea typeface="Calibri" pitchFamily="34" charset="-122"/>
                 <a:cs typeface="Calibri" pitchFamily="34" charset="-120"/>
               </a:rPr>
-              <a:t>   · 15 min</a:t>
-            </a:r>
-            <a:endParaRPr lang="en-US" sz="1250" dirty="0"/>
+              <a:t>   · 12 min</a:t>
+            </a:r>
+            <a:endParaRPr lang="en-US" sz="1200" dirty="0"/>
           </a:p>
         </p:txBody>
       </p:sp>
@@ -1282,27 +1282,27 @@
         </p:nvSpPr>
         <p:spPr>
           <a:xfrm>
-            <a:off x="1024128" y="2560320"/>
-            <a:ext cx="5971032" cy="384048"/>
-          </a:xfrm>
-          <a:prstGeom prst="rect">
-            <a:avLst/>
-          </a:prstGeom>
-          <a:noFill/>
-          <a:ln/>
-        </p:spPr>
-        <p:txBody>
-          <a:bodyPr wrap="square" lIns="0" tIns="0" rIns="0" bIns="0" rtlCol="0" anchor="ctr"/>
-          <a:lstStyle/>
-          <a:p>
-            <a:pPr indent="0" marL="0">
-              <a:lnSpc>
-                <a:spcPts val="1150"/>
-              </a:lnSpc>
-              <a:buNone/>
-            </a:pPr>
-            <a:r>
-              <a:rPr lang="en-US" sz="900" b="1" dirty="0">
+            <a:off x="950976" y="2368296"/>
+            <a:ext cx="6080760" cy="365760"/>
+          </a:xfrm>
+          <a:prstGeom prst="rect">
+            <a:avLst/>
+          </a:prstGeom>
+          <a:noFill/>
+          <a:ln/>
+        </p:spPr>
+        <p:txBody>
+          <a:bodyPr wrap="square" lIns="0" tIns="0" rIns="0" bIns="0" rtlCol="0" anchor="ctr"/>
+          <a:lstStyle/>
+          <a:p>
+            <a:pPr indent="0" marL="0">
+              <a:lnSpc>
+                <a:spcPts val="1100"/>
+              </a:lnSpc>
+              <a:buNone/>
+            </a:pPr>
+            <a:r>
+              <a:rPr lang="en-US" sz="880" b="1" dirty="0">
                 <a:solidFill>
                   <a:srgbClr val="B8985A"/>
                 </a:solidFill>
@@ -1314,12 +1314,12 @@
             </a:r>
             <a:pPr indent="0" marL="0">
               <a:lnSpc>
-                <a:spcPts val="1150"/>
-              </a:lnSpc>
-              <a:buNone/>
-            </a:pPr>
-            <a:r>
-              <a:rPr lang="en-US" sz="900" i="1" dirty="0">
+                <a:spcPts val="1100"/>
+              </a:lnSpc>
+              <a:buNone/>
+            </a:pPr>
+            <a:r>
+              <a:rPr lang="en-US" sz="880" i="1" dirty="0">
                 <a:solidFill>
                   <a:srgbClr val="232B3A"/>
                 </a:solidFill>
@@ -1329,7 +1329,7 @@
               </a:rPr>
               <a:t>“Me contem o processo do início ao fim, como se eu fosse fazer esse trabalho amanhã: o que chega, quem pega, o que faz, para onde vai?”</a:t>
             </a:r>
-            <a:endParaRPr lang="en-US" sz="900" dirty="0"/>
+            <a:endParaRPr lang="en-US" sz="880" dirty="0"/>
           </a:p>
         </p:txBody>
       </p:sp>
@@ -1341,27 +1341,27 @@
         </p:nvSpPr>
         <p:spPr>
           <a:xfrm>
-            <a:off x="1024128" y="2985516"/>
-            <a:ext cx="5971032" cy="256032"/>
-          </a:xfrm>
-          <a:prstGeom prst="rect">
-            <a:avLst/>
-          </a:prstGeom>
-          <a:noFill/>
-          <a:ln/>
-        </p:spPr>
-        <p:txBody>
-          <a:bodyPr wrap="square" lIns="0" tIns="0" rIns="0" bIns="0" rtlCol="0" anchor="ctr"/>
-          <a:lstStyle/>
-          <a:p>
-            <a:pPr indent="0" marL="0">
-              <a:lnSpc>
-                <a:spcPts val="1150"/>
-              </a:lnSpc>
-              <a:buNone/>
-            </a:pPr>
-            <a:r>
-              <a:rPr lang="en-US" sz="900" b="1" dirty="0">
+            <a:off x="950976" y="2770632"/>
+            <a:ext cx="6080760" cy="237744"/>
+          </a:xfrm>
+          <a:prstGeom prst="rect">
+            <a:avLst/>
+          </a:prstGeom>
+          <a:noFill/>
+          <a:ln/>
+        </p:spPr>
+        <p:txBody>
+          <a:bodyPr wrap="square" lIns="0" tIns="0" rIns="0" bIns="0" rtlCol="0" anchor="ctr"/>
+          <a:lstStyle/>
+          <a:p>
+            <a:pPr indent="0" marL="0">
+              <a:lnSpc>
+                <a:spcPts val="1100"/>
+              </a:lnSpc>
+              <a:buNone/>
+            </a:pPr>
+            <a:r>
+              <a:rPr lang="en-US" sz="880" b="1" dirty="0">
                 <a:solidFill>
                   <a:srgbClr val="B8985A"/>
                 </a:solidFill>
@@ -1373,12 +1373,12 @@
             </a:r>
             <a:pPr indent="0" marL="0">
               <a:lnSpc>
-                <a:spcPts val="1150"/>
-              </a:lnSpc>
-              <a:buNone/>
-            </a:pPr>
-            <a:r>
-              <a:rPr lang="en-US" sz="900" i="1" dirty="0">
+                <a:spcPts val="1100"/>
+              </a:lnSpc>
+              <a:buNone/>
+            </a:pPr>
+            <a:r>
+              <a:rPr lang="en-US" sz="880" i="1" dirty="0">
                 <a:solidFill>
                   <a:srgbClr val="232B3A"/>
                 </a:solidFill>
@@ -1386,9 +1386,26 @@
                 <a:ea typeface="Calibri" pitchFamily="34" charset="-122"/>
                 <a:cs typeface="Calibri" pitchFamily="34" charset="-120"/>
               </a:rPr>
-              <a:t>“Quantas vezes por dia? Quantos itens por mês? Quanto tempo cada um? Quantas pessoas?”</a:t>
-            </a:r>
-            <a:endParaRPr lang="en-US" sz="900" dirty="0"/>
+              <a:t>“O que DISPARA o processo — e-mail, arquivo, pedido, data do mês?”</a:t>
+            </a:r>
+            <a:pPr indent="0" marL="0">
+              <a:lnSpc>
+                <a:spcPts val="1100"/>
+              </a:lnSpc>
+              <a:buNone/>
+            </a:pPr>
+            <a:r>
+              <a:rPr lang="en-US" sz="820" dirty="0">
+                <a:solidFill>
+                  <a:srgbClr val="5A6472"/>
+                </a:solidFill>
+                <a:latin typeface="Calibri" pitchFamily="34" charset="0"/>
+                <a:ea typeface="Calibri" pitchFamily="34" charset="-122"/>
+                <a:cs typeface="Calibri" pitchFamily="34" charset="-120"/>
+              </a:rPr>
+              <a:t>  a entrada do fluxo</a:t>
+            </a:r>
+            <a:endParaRPr lang="en-US" sz="880" dirty="0"/>
           </a:p>
         </p:txBody>
       </p:sp>
@@ -1400,27 +1417,27 @@
         </p:nvSpPr>
         <p:spPr>
           <a:xfrm>
-            <a:off x="1024128" y="3282696"/>
-            <a:ext cx="5971032" cy="256032"/>
-          </a:xfrm>
-          <a:prstGeom prst="rect">
-            <a:avLst/>
-          </a:prstGeom>
-          <a:noFill/>
-          <a:ln/>
-        </p:spPr>
-        <p:txBody>
-          <a:bodyPr wrap="square" lIns="0" tIns="0" rIns="0" bIns="0" rtlCol="0" anchor="ctr"/>
-          <a:lstStyle/>
-          <a:p>
-            <a:pPr indent="0" marL="0">
-              <a:lnSpc>
-                <a:spcPts val="1150"/>
-              </a:lnSpc>
-              <a:buNone/>
-            </a:pPr>
-            <a:r>
-              <a:rPr lang="en-US" sz="900" b="1" dirty="0">
+            <a:off x="950976" y="3044952"/>
+            <a:ext cx="6080760" cy="237744"/>
+          </a:xfrm>
+          <a:prstGeom prst="rect">
+            <a:avLst/>
+          </a:prstGeom>
+          <a:noFill/>
+          <a:ln/>
+        </p:spPr>
+        <p:txBody>
+          <a:bodyPr wrap="square" lIns="0" tIns="0" rIns="0" bIns="0" rtlCol="0" anchor="ctr"/>
+          <a:lstStyle/>
+          <a:p>
+            <a:pPr indent="0" marL="0">
+              <a:lnSpc>
+                <a:spcPts val="1100"/>
+              </a:lnSpc>
+              <a:buNone/>
+            </a:pPr>
+            <a:r>
+              <a:rPr lang="en-US" sz="880" b="1" dirty="0">
                 <a:solidFill>
                   <a:srgbClr val="B8985A"/>
                 </a:solidFill>
@@ -1432,12 +1449,12 @@
             </a:r>
             <a:pPr indent="0" marL="0">
               <a:lnSpc>
-                <a:spcPts val="1150"/>
-              </a:lnSpc>
-              <a:buNone/>
-            </a:pPr>
-            <a:r>
-              <a:rPr lang="en-US" sz="900" i="1" dirty="0">
+                <a:spcPts val="1100"/>
+              </a:lnSpc>
+              <a:buNone/>
+            </a:pPr>
+            <a:r>
+              <a:rPr lang="en-US" sz="880" i="1" dirty="0">
                 <a:solidFill>
                   <a:srgbClr val="232B3A"/>
                 </a:solidFill>
@@ -1445,9 +1462,26 @@
                 <a:ea typeface="Calibri" pitchFamily="34" charset="-122"/>
                 <a:cs typeface="Calibri" pitchFamily="34" charset="-120"/>
               </a:rPr>
-              <a:t>“O que acontece quando dá errado? Com que frequência? Quanto custa o erro?”</a:t>
-            </a:r>
-            <a:endParaRPr lang="en-US" sz="900" dirty="0"/>
+              <a:t>“Resposta na hora, ou pode rodar em lote — de noite?”</a:t>
+            </a:r>
+            <a:pPr indent="0" marL="0">
+              <a:lnSpc>
+                <a:spcPts val="1100"/>
+              </a:lnSpc>
+              <a:buNone/>
+            </a:pPr>
+            <a:r>
+              <a:rPr lang="en-US" sz="820" dirty="0">
+                <a:solidFill>
+                  <a:srgbClr val="5A6472"/>
+                </a:solidFill>
+                <a:latin typeface="Calibri" pitchFamily="34" charset="0"/>
+                <a:ea typeface="Calibri" pitchFamily="34" charset="-122"/>
+                <a:cs typeface="Calibri" pitchFamily="34" charset="-120"/>
+              </a:rPr>
+              <a:t>  ritmo = arquitetura e custo</a:t>
+            </a:r>
+            <a:endParaRPr lang="en-US" sz="880" dirty="0"/>
           </a:p>
         </p:txBody>
       </p:sp>
@@ -1459,27 +1493,27 @@
         </p:nvSpPr>
         <p:spPr>
           <a:xfrm>
-            <a:off x="1024128" y="3579876"/>
-            <a:ext cx="5971032" cy="256032"/>
-          </a:xfrm>
-          <a:prstGeom prst="rect">
-            <a:avLst/>
-          </a:prstGeom>
-          <a:noFill/>
-          <a:ln/>
-        </p:spPr>
-        <p:txBody>
-          <a:bodyPr wrap="square" lIns="0" tIns="0" rIns="0" bIns="0" rtlCol="0" anchor="ctr"/>
-          <a:lstStyle/>
-          <a:p>
-            <a:pPr indent="0" marL="0">
-              <a:lnSpc>
-                <a:spcPts val="1150"/>
-              </a:lnSpc>
-              <a:buNone/>
-            </a:pPr>
-            <a:r>
-              <a:rPr lang="en-US" sz="900" b="1" dirty="0">
+            <a:off x="950976" y="3319272"/>
+            <a:ext cx="6080760" cy="237744"/>
+          </a:xfrm>
+          <a:prstGeom prst="rect">
+            <a:avLst/>
+          </a:prstGeom>
+          <a:noFill/>
+          <a:ln/>
+        </p:spPr>
+        <p:txBody>
+          <a:bodyPr wrap="square" lIns="0" tIns="0" rIns="0" bIns="0" rtlCol="0" anchor="ctr"/>
+          <a:lstStyle/>
+          <a:p>
+            <a:pPr indent="0" marL="0">
+              <a:lnSpc>
+                <a:spcPts val="1100"/>
+              </a:lnSpc>
+              <a:buNone/>
+            </a:pPr>
+            <a:r>
+              <a:rPr lang="en-US" sz="880" b="1" dirty="0">
                 <a:solidFill>
                   <a:srgbClr val="B8985A"/>
                 </a:solidFill>
@@ -1491,12 +1525,12 @@
             </a:r>
             <a:pPr indent="0" marL="0">
               <a:lnSpc>
-                <a:spcPts val="1150"/>
-              </a:lnSpc>
-              <a:buNone/>
-            </a:pPr>
-            <a:r>
-              <a:rPr lang="en-US" sz="900" i="1" dirty="0">
+                <a:spcPts val="1100"/>
+              </a:lnSpc>
+              <a:buNone/>
+            </a:pPr>
+            <a:r>
+              <a:rPr lang="en-US" sz="880" i="1" dirty="0">
                 <a:solidFill>
                   <a:srgbClr val="232B3A"/>
                 </a:solidFill>
@@ -1504,16 +1538,75 @@
                 <a:ea typeface="Calibri" pitchFamily="34" charset="-122"/>
                 <a:cs typeface="Calibri" pitchFamily="34" charset="-120"/>
               </a:rPr>
-              <a:t>“E quando NÃO segue o padrão? Dois exemplos reais de exceção.”</a:t>
-            </a:r>
-            <a:pPr indent="0" marL="0">
-              <a:lnSpc>
-                <a:spcPts val="1150"/>
-              </a:lnSpc>
-              <a:buNone/>
-            </a:pPr>
-            <a:r>
-              <a:rPr lang="en-US" sz="850" dirty="0">
+              <a:t>“Quantos por dia/mês? Quanto tempo cada um? Quantas pessoas tocam?”</a:t>
+            </a:r>
+            <a:endParaRPr lang="en-US" sz="880" dirty="0"/>
+          </a:p>
+        </p:txBody>
+      </p:sp>
+      <p:sp>
+        <p:nvSpPr>
+          <p:cNvPr id="14" name="Text 12"/>
+          <p:cNvSpPr/>
+          <p:nvPr/>
+        </p:nvSpPr>
+        <p:spPr>
+          <a:xfrm>
+            <a:off x="950976" y="3593592"/>
+            <a:ext cx="6080760" cy="237744"/>
+          </a:xfrm>
+          <a:prstGeom prst="rect">
+            <a:avLst/>
+          </a:prstGeom>
+          <a:noFill/>
+          <a:ln/>
+        </p:spPr>
+        <p:txBody>
+          <a:bodyPr wrap="square" lIns="0" tIns="0" rIns="0" bIns="0" rtlCol="0" anchor="ctr"/>
+          <a:lstStyle/>
+          <a:p>
+            <a:pPr indent="0" marL="0">
+              <a:lnSpc>
+                <a:spcPts val="1100"/>
+              </a:lnSpc>
+              <a:buNone/>
+            </a:pPr>
+            <a:r>
+              <a:rPr lang="en-US" sz="880" b="1" dirty="0">
+                <a:solidFill>
+                  <a:srgbClr val="B8985A"/>
+                </a:solidFill>
+                <a:latin typeface="Calibri" pitchFamily="34" charset="0"/>
+                <a:ea typeface="Calibri" pitchFamily="34" charset="-122"/>
+                <a:cs typeface="Calibri" pitchFamily="34" charset="-120"/>
+              </a:rPr>
+              <a:t>— </a:t>
+            </a:r>
+            <a:pPr indent="0" marL="0">
+              <a:lnSpc>
+                <a:spcPts val="1100"/>
+              </a:lnSpc>
+              <a:buNone/>
+            </a:pPr>
+            <a:r>
+              <a:rPr lang="en-US" sz="880" i="1" dirty="0">
+                <a:solidFill>
+                  <a:srgbClr val="232B3A"/>
+                </a:solidFill>
+                <a:latin typeface="Calibri" pitchFamily="34" charset="0"/>
+                <a:ea typeface="Calibri" pitchFamily="34" charset="-122"/>
+                <a:cs typeface="Calibri" pitchFamily="34" charset="-120"/>
+              </a:rPr>
+              <a:t>“E quando NÃO segue o padrão? Dois exemplos reais.”</a:t>
+            </a:r>
+            <a:pPr indent="0" marL="0">
+              <a:lnSpc>
+                <a:spcPts val="1100"/>
+              </a:lnSpc>
+              <a:buNone/>
+            </a:pPr>
+            <a:r>
+              <a:rPr lang="en-US" sz="820" dirty="0">
                 <a:solidFill>
                   <a:srgbClr val="5A6472"/>
                 </a:solidFill>
@@ -1521,41 +1614,41 @@
                 <a:ea typeface="Calibri" pitchFamily="34" charset="-122"/>
                 <a:cs typeface="Calibri" pitchFamily="34" charset="-120"/>
               </a:rPr>
-              <a:t>  ← onde protótipos morrem</a:t>
-            </a:r>
-            <a:endParaRPr lang="en-US" sz="900" dirty="0"/>
-          </a:p>
-        </p:txBody>
-      </p:sp>
-      <p:sp>
-        <p:nvSpPr>
-          <p:cNvPr id="14" name="Text 12"/>
-          <p:cNvSpPr/>
-          <p:nvPr/>
-        </p:nvSpPr>
-        <p:spPr>
-          <a:xfrm>
-            <a:off x="1024128" y="3877056"/>
-            <a:ext cx="5971032" cy="256032"/>
-          </a:xfrm>
-          <a:prstGeom prst="rect">
-            <a:avLst/>
-          </a:prstGeom>
-          <a:noFill/>
-          <a:ln/>
-        </p:spPr>
-        <p:txBody>
-          <a:bodyPr wrap="square" lIns="0" tIns="0" rIns="0" bIns="0" rtlCol="0" anchor="ctr"/>
-          <a:lstStyle/>
-          <a:p>
-            <a:pPr indent="0" marL="0">
-              <a:lnSpc>
-                <a:spcPts val="1150"/>
-              </a:lnSpc>
-              <a:buNone/>
-            </a:pPr>
-            <a:r>
-              <a:rPr lang="en-US" sz="900" b="1" dirty="0">
+              <a:t>  ← os casos de teste; onde protótipos morrem</a:t>
+            </a:r>
+            <a:endParaRPr lang="en-US" sz="880" dirty="0"/>
+          </a:p>
+        </p:txBody>
+      </p:sp>
+      <p:sp>
+        <p:nvSpPr>
+          <p:cNvPr id="15" name="Text 13"/>
+          <p:cNvSpPr/>
+          <p:nvPr/>
+        </p:nvSpPr>
+        <p:spPr>
+          <a:xfrm>
+            <a:off x="950976" y="3867912"/>
+            <a:ext cx="6080760" cy="237744"/>
+          </a:xfrm>
+          <a:prstGeom prst="rect">
+            <a:avLst/>
+          </a:prstGeom>
+          <a:noFill/>
+          <a:ln/>
+        </p:spPr>
+        <p:txBody>
+          <a:bodyPr wrap="square" lIns="0" tIns="0" rIns="0" bIns="0" rtlCol="0" anchor="ctr"/>
+          <a:lstStyle/>
+          <a:p>
+            <a:pPr indent="0" marL="0">
+              <a:lnSpc>
+                <a:spcPts val="1100"/>
+              </a:lnSpc>
+              <a:buNone/>
+            </a:pPr>
+            <a:r>
+              <a:rPr lang="en-US" sz="880" b="1" dirty="0">
                 <a:solidFill>
                   <a:srgbClr val="B8985A"/>
                 </a:solidFill>
@@ -1567,12 +1660,12 @@
             </a:r>
             <a:pPr indent="0" marL="0">
               <a:lnSpc>
-                <a:spcPts val="1150"/>
-              </a:lnSpc>
-              <a:buNone/>
-            </a:pPr>
-            <a:r>
-              <a:rPr lang="en-US" sz="900" i="1" dirty="0">
+                <a:spcPts val="1100"/>
+              </a:lnSpc>
+              <a:buNone/>
+            </a:pPr>
+            <a:r>
+              <a:rPr lang="en-US" sz="880" i="1" dirty="0">
                 <a:solidFill>
                   <a:srgbClr val="232B3A"/>
                 </a:solidFill>
@@ -1580,16 +1673,16 @@
                 <a:ea typeface="Calibri" pitchFamily="34" charset="-122"/>
                 <a:cs typeface="Calibri" pitchFamily="34" charset="-120"/>
               </a:rPr>
-              <a:t>“Se só um problema pudesse ser resolvido este mês, qual tira mais dinheiro/sono?”</a:t>
-            </a:r>
-            <a:pPr indent="0" marL="0">
-              <a:lnSpc>
-                <a:spcPts val="1150"/>
-              </a:lnSpc>
-              <a:buNone/>
-            </a:pPr>
-            <a:r>
-              <a:rPr lang="en-US" sz="850" dirty="0">
+              <a:t>“Se só um pudesse ser resolvido este mês, qual tira mais dinheiro/sono?”</a:t>
+            </a:r>
+            <a:pPr indent="0" marL="0">
+              <a:lnSpc>
+                <a:spcPts val="1100"/>
+              </a:lnSpc>
+              <a:buNone/>
+            </a:pPr>
+            <a:r>
+              <a:rPr lang="en-US" sz="820" dirty="0">
                 <a:solidFill>
                   <a:srgbClr val="5A6472"/>
                 </a:solidFill>
@@ -1599,20 +1692,20 @@
               </a:rPr>
               <a:t>  protótipo é UM caso</a:t>
             </a:r>
-            <a:endParaRPr lang="en-US" sz="900" dirty="0"/>
-          </a:p>
-        </p:txBody>
-      </p:sp>
-      <p:sp>
-        <p:nvSpPr>
-          <p:cNvPr id="15" name="Shape 13"/>
-          <p:cNvSpPr/>
-          <p:nvPr/>
-        </p:nvSpPr>
-        <p:spPr>
-          <a:xfrm>
-            <a:off x="1024128" y="4210812"/>
-            <a:ext cx="5971032" cy="0"/>
+            <a:endParaRPr lang="en-US" sz="880" dirty="0"/>
+          </a:p>
+        </p:txBody>
+      </p:sp>
+      <p:sp>
+        <p:nvSpPr>
+          <p:cNvPr id="16" name="Shape 14"/>
+          <p:cNvSpPr/>
+          <p:nvPr/>
+        </p:nvSpPr>
+        <p:spPr>
+          <a:xfrm>
+            <a:off x="950976" y="4169664"/>
+            <a:ext cx="6080760" cy="0"/>
           </a:xfrm>
           <a:prstGeom prst="line">
             <a:avLst/>
@@ -1628,13 +1721,13 @@
       </p:sp>
       <p:sp>
         <p:nvSpPr>
-          <p:cNvPr id="16" name="Text 14"/>
-          <p:cNvSpPr/>
-          <p:nvPr/>
-        </p:nvSpPr>
-        <p:spPr>
-          <a:xfrm>
-            <a:off x="521208" y="4274820"/>
+          <p:cNvPr id="17" name="Text 15"/>
+          <p:cNvSpPr/>
+          <p:nvPr/>
+        </p:nvSpPr>
+        <p:spPr>
+          <a:xfrm>
+            <a:off x="484632" y="4224528"/>
             <a:ext cx="457200" cy="457200"/>
           </a:xfrm>
           <a:prstGeom prst="rect">
@@ -1651,7 +1744,7 @@
               <a:buNone/>
             </a:pPr>
             <a:r>
-              <a:rPr lang="en-US" sz="2100" b="1" dirty="0">
+              <a:rPr lang="en-US" sz="2000" b="1" dirty="0">
                 <a:solidFill>
                   <a:srgbClr val="B8985A"/>
                 </a:solidFill>
@@ -1661,36 +1754,36 @@
               </a:rPr>
               <a:t>2</a:t>
             </a:r>
-            <a:endParaRPr lang="en-US" sz="2100" dirty="0"/>
-          </a:p>
-        </p:txBody>
-      </p:sp>
-      <p:sp>
-        <p:nvSpPr>
-          <p:cNvPr id="17" name="Text 15"/>
-          <p:cNvSpPr/>
-          <p:nvPr/>
-        </p:nvSpPr>
-        <p:spPr>
-          <a:xfrm>
-            <a:off x="1024128" y="4329684"/>
-            <a:ext cx="5971032" cy="237744"/>
-          </a:xfrm>
-          <a:prstGeom prst="rect">
-            <a:avLst/>
-          </a:prstGeom>
-          <a:noFill/>
-          <a:ln/>
-        </p:spPr>
-        <p:txBody>
-          <a:bodyPr wrap="square" lIns="0" tIns="0" rIns="0" bIns="0" rtlCol="0" anchor="ctr"/>
-          <a:lstStyle/>
-          <a:p>
-            <a:pPr indent="0" marL="0">
-              <a:buNone/>
-            </a:pPr>
-            <a:r>
-              <a:rPr lang="en-US" sz="1250" b="1" dirty="0">
+            <a:endParaRPr lang="en-US" sz="2000" dirty="0"/>
+          </a:p>
+        </p:txBody>
+      </p:sp>
+      <p:sp>
+        <p:nvSpPr>
+          <p:cNvPr id="18" name="Text 16"/>
+          <p:cNvSpPr/>
+          <p:nvPr/>
+        </p:nvSpPr>
+        <p:spPr>
+          <a:xfrm>
+            <a:off x="950976" y="4279392"/>
+            <a:ext cx="6080760" cy="228600"/>
+          </a:xfrm>
+          <a:prstGeom prst="rect">
+            <a:avLst/>
+          </a:prstGeom>
+          <a:noFill/>
+          <a:ln/>
+        </p:spPr>
+        <p:txBody>
+          <a:bodyPr wrap="square" lIns="0" tIns="0" rIns="0" bIns="0" rtlCol="0" anchor="ctr"/>
+          <a:lstStyle/>
+          <a:p>
+            <a:pPr indent="0" marL="0">
+              <a:buNone/>
+            </a:pPr>
+            <a:r>
+              <a:rPr lang="en-US" sz="1200" b="1" dirty="0">
                 <a:solidFill>
                   <a:srgbClr val="1B2A4A"/>
                 </a:solidFill>
@@ -1698,13 +1791,13 @@
                 <a:ea typeface="Cambria" pitchFamily="34" charset="-122"/>
                 <a:cs typeface="Cambria" pitchFamily="34" charset="-120"/>
               </a:rPr>
-              <a:t>O número do sucesso</a:t>
-            </a:r>
-            <a:pPr indent="0" marL="0">
-              <a:buNone/>
-            </a:pPr>
-            <a:r>
-              <a:rPr lang="en-US" sz="850" dirty="0">
+              <a:t>O número do sucesso e o custo do erro</a:t>
+            </a:r>
+            <a:pPr indent="0" marL="0">
+              <a:buNone/>
+            </a:pPr>
+            <a:r>
+              <a:rPr lang="en-US" sz="800" dirty="0">
                 <a:solidFill>
                   <a:srgbClr val="5A6472"/>
                 </a:solidFill>
@@ -1714,39 +1807,39 @@
               </a:rPr>
               <a:t>   · 10 min · O MAIS IMPORTANTE</a:t>
             </a:r>
-            <a:endParaRPr lang="en-US" sz="1250" dirty="0"/>
-          </a:p>
-        </p:txBody>
-      </p:sp>
-      <p:sp>
-        <p:nvSpPr>
-          <p:cNvPr id="18" name="Text 16"/>
-          <p:cNvSpPr/>
-          <p:nvPr/>
-        </p:nvSpPr>
-        <p:spPr>
-          <a:xfrm>
-            <a:off x="1024128" y="4604004"/>
-            <a:ext cx="5971032" cy="256032"/>
-          </a:xfrm>
-          <a:prstGeom prst="rect">
-            <a:avLst/>
-          </a:prstGeom>
-          <a:noFill/>
-          <a:ln/>
-        </p:spPr>
-        <p:txBody>
-          <a:bodyPr wrap="square" lIns="0" tIns="0" rIns="0" bIns="0" rtlCol="0" anchor="ctr"/>
-          <a:lstStyle/>
-          <a:p>
-            <a:pPr indent="0" marL="0">
-              <a:lnSpc>
-                <a:spcPts val="1150"/>
-              </a:lnSpc>
-              <a:buNone/>
-            </a:pPr>
-            <a:r>
-              <a:rPr lang="en-US" sz="900" b="1" dirty="0">
+            <a:endParaRPr lang="en-US" sz="1200" dirty="0"/>
+          </a:p>
+        </p:txBody>
+      </p:sp>
+      <p:sp>
+        <p:nvSpPr>
+          <p:cNvPr id="19" name="Text 17"/>
+          <p:cNvSpPr/>
+          <p:nvPr/>
+        </p:nvSpPr>
+        <p:spPr>
+          <a:xfrm>
+            <a:off x="950976" y="4544568"/>
+            <a:ext cx="6080760" cy="237744"/>
+          </a:xfrm>
+          <a:prstGeom prst="rect">
+            <a:avLst/>
+          </a:prstGeom>
+          <a:noFill/>
+          <a:ln/>
+        </p:spPr>
+        <p:txBody>
+          <a:bodyPr wrap="square" lIns="0" tIns="0" rIns="0" bIns="0" rtlCol="0" anchor="ctr"/>
+          <a:lstStyle/>
+          <a:p>
+            <a:pPr indent="0" marL="0">
+              <a:lnSpc>
+                <a:spcPts val="1100"/>
+              </a:lnSpc>
+              <a:buNone/>
+            </a:pPr>
+            <a:r>
+              <a:rPr lang="en-US" sz="880" b="1" dirty="0">
                 <a:solidFill>
                   <a:srgbClr val="B8985A"/>
                 </a:solidFill>
@@ -1758,12 +1851,12 @@
             </a:r>
             <a:pPr indent="0" marL="0">
               <a:lnSpc>
-                <a:spcPts val="1150"/>
-              </a:lnSpc>
-              <a:buNone/>
-            </a:pPr>
-            <a:r>
-              <a:rPr lang="en-US" sz="900" i="1" dirty="0">
+                <a:spcPts val="1100"/>
+              </a:lnSpc>
+              <a:buNone/>
+            </a:pPr>
+            <a:r>
+              <a:rPr lang="en-US" sz="880" i="1" dirty="0">
                 <a:solidFill>
                   <a:srgbClr val="232B3A"/>
                 </a:solidFill>
@@ -1771,16 +1864,16 @@
                 <a:ea typeface="Calibri" pitchFamily="34" charset="-122"/>
                 <a:cs typeface="Calibri" pitchFamily="34" charset="-120"/>
               </a:rPr>
-              <a:t>“Qual é o número de hoje — tempo, erro, custo, atraso?”</a:t>
-            </a:r>
-            <a:pPr indent="0" marL="0">
-              <a:lnSpc>
-                <a:spcPts val="1150"/>
-              </a:lnSpc>
-              <a:buNone/>
-            </a:pPr>
-            <a:r>
-              <a:rPr lang="en-US" sz="850" dirty="0">
+              <a:t>“Qual é o número de hoje — tempo, erro, custo, atraso? Já é medido? Onde?”</a:t>
+            </a:r>
+            <a:pPr indent="0" marL="0">
+              <a:lnSpc>
+                <a:spcPts val="1100"/>
+              </a:lnSpc>
+              <a:buNone/>
+            </a:pPr>
+            <a:r>
+              <a:rPr lang="en-US" sz="820" dirty="0">
                 <a:solidFill>
                   <a:srgbClr val="5A6472"/>
                 </a:solidFill>
@@ -1790,39 +1883,39 @@
               </a:rPr>
               <a:t>  baseline</a:t>
             </a:r>
-            <a:endParaRPr lang="en-US" sz="900" dirty="0"/>
-          </a:p>
-        </p:txBody>
-      </p:sp>
-      <p:sp>
-        <p:nvSpPr>
-          <p:cNvPr id="19" name="Text 17"/>
-          <p:cNvSpPr/>
-          <p:nvPr/>
-        </p:nvSpPr>
-        <p:spPr>
-          <a:xfrm>
-            <a:off x="1024128" y="4901184"/>
-            <a:ext cx="5971032" cy="256032"/>
-          </a:xfrm>
-          <a:prstGeom prst="rect">
-            <a:avLst/>
-          </a:prstGeom>
-          <a:noFill/>
-          <a:ln/>
-        </p:spPr>
-        <p:txBody>
-          <a:bodyPr wrap="square" lIns="0" tIns="0" rIns="0" bIns="0" rtlCol="0" anchor="ctr"/>
-          <a:lstStyle/>
-          <a:p>
-            <a:pPr indent="0" marL="0">
-              <a:lnSpc>
-                <a:spcPts val="1150"/>
-              </a:lnSpc>
-              <a:buNone/>
-            </a:pPr>
-            <a:r>
-              <a:rPr lang="en-US" sz="900" b="1" dirty="0">
+            <a:endParaRPr lang="en-US" sz="880" dirty="0"/>
+          </a:p>
+        </p:txBody>
+      </p:sp>
+      <p:sp>
+        <p:nvSpPr>
+          <p:cNvPr id="20" name="Text 18"/>
+          <p:cNvSpPr/>
+          <p:nvPr/>
+        </p:nvSpPr>
+        <p:spPr>
+          <a:xfrm>
+            <a:off x="950976" y="4818888"/>
+            <a:ext cx="6080760" cy="237744"/>
+          </a:xfrm>
+          <a:prstGeom prst="rect">
+            <a:avLst/>
+          </a:prstGeom>
+          <a:noFill/>
+          <a:ln/>
+        </p:spPr>
+        <p:txBody>
+          <a:bodyPr wrap="square" lIns="0" tIns="0" rIns="0" bIns="0" rtlCol="0" anchor="ctr"/>
+          <a:lstStyle/>
+          <a:p>
+            <a:pPr indent="0" marL="0">
+              <a:lnSpc>
+                <a:spcPts val="1100"/>
+              </a:lnSpc>
+              <a:buNone/>
+            </a:pPr>
+            <a:r>
+              <a:rPr lang="en-US" sz="880" b="1" dirty="0">
                 <a:solidFill>
                   <a:srgbClr val="B8985A"/>
                 </a:solidFill>
@@ -1834,12 +1927,12 @@
             </a:r>
             <a:pPr indent="0" marL="0">
               <a:lnSpc>
-                <a:spcPts val="1150"/>
-              </a:lnSpc>
-              <a:buNone/>
-            </a:pPr>
-            <a:r>
-              <a:rPr lang="en-US" sz="900" i="1" dirty="0">
+                <a:spcPts val="1100"/>
+              </a:lnSpc>
+              <a:buNone/>
+            </a:pPr>
+            <a:r>
+              <a:rPr lang="en-US" sz="880" i="1" dirty="0">
                 <a:solidFill>
                   <a:srgbClr val="232B3A"/>
                 </a:solidFill>
@@ -1847,16 +1940,16 @@
                 <a:ea typeface="Calibri" pitchFamily="34" charset="-122"/>
                 <a:cs typeface="Calibri" pitchFamily="34" charset="-120"/>
               </a:rPr>
-              <a:t>“Já é medido? Onde? Quem mede?”</a:t>
-            </a:r>
-            <a:pPr indent="0" marL="0">
-              <a:lnSpc>
-                <a:spcPts val="1150"/>
-              </a:lnSpc>
-              <a:buNone/>
-            </a:pPr>
-            <a:r>
-              <a:rPr lang="en-US" sz="850" dirty="0">
+              <a:t>“Que número faria vocês dizerem ‘aprovado, vamos investir’?”</a:t>
+            </a:r>
+            <a:pPr indent="0" marL="0">
+              <a:lnSpc>
+                <a:spcPts val="1100"/>
+              </a:lnSpc>
+              <a:buNone/>
+            </a:pPr>
+            <a:r>
+              <a:rPr lang="en-US" sz="820" dirty="0">
                 <a:solidFill>
                   <a:srgbClr val="5A6472"/>
                 </a:solidFill>
@@ -1864,41 +1957,41 @@
                 <a:ea typeface="Calibri" pitchFamily="34" charset="-122"/>
                 <a:cs typeface="Calibri" pitchFamily="34" charset="-120"/>
               </a:rPr>
-              <a:t>  se não: medir o hoje é a 1ª tarefa do protótipo</a:t>
-            </a:r>
-            <a:endParaRPr lang="en-US" sz="900" dirty="0"/>
-          </a:p>
-        </p:txBody>
-      </p:sp>
-      <p:sp>
-        <p:nvSpPr>
-          <p:cNvPr id="20" name="Text 18"/>
-          <p:cNvSpPr/>
-          <p:nvPr/>
-        </p:nvSpPr>
-        <p:spPr>
-          <a:xfrm>
-            <a:off x="1024128" y="5198364"/>
-            <a:ext cx="5971032" cy="256032"/>
-          </a:xfrm>
-          <a:prstGeom prst="rect">
-            <a:avLst/>
-          </a:prstGeom>
-          <a:noFill/>
-          <a:ln/>
-        </p:spPr>
-        <p:txBody>
-          <a:bodyPr wrap="square" lIns="0" tIns="0" rIns="0" bIns="0" rtlCol="0" anchor="ctr"/>
-          <a:lstStyle/>
-          <a:p>
-            <a:pPr indent="0" marL="0">
-              <a:lnSpc>
-                <a:spcPts val="1150"/>
-              </a:lnSpc>
-              <a:buNone/>
-            </a:pPr>
-            <a:r>
-              <a:rPr lang="en-US" sz="900" b="1" dirty="0">
+              <a:t>  a meta do GO — combinada ANTES</a:t>
+            </a:r>
+            <a:endParaRPr lang="en-US" sz="880" dirty="0"/>
+          </a:p>
+        </p:txBody>
+      </p:sp>
+      <p:sp>
+        <p:nvSpPr>
+          <p:cNvPr id="21" name="Text 19"/>
+          <p:cNvSpPr/>
+          <p:nvPr/>
+        </p:nvSpPr>
+        <p:spPr>
+          <a:xfrm>
+            <a:off x="950976" y="5093208"/>
+            <a:ext cx="6080760" cy="237744"/>
+          </a:xfrm>
+          <a:prstGeom prst="rect">
+            <a:avLst/>
+          </a:prstGeom>
+          <a:noFill/>
+          <a:ln/>
+        </p:spPr>
+        <p:txBody>
+          <a:bodyPr wrap="square" lIns="0" tIns="0" rIns="0" bIns="0" rtlCol="0" anchor="ctr"/>
+          <a:lstStyle/>
+          <a:p>
+            <a:pPr indent="0" marL="0">
+              <a:lnSpc>
+                <a:spcPts val="1100"/>
+              </a:lnSpc>
+              <a:buNone/>
+            </a:pPr>
+            <a:r>
+              <a:rPr lang="en-US" sz="880" b="1" dirty="0">
                 <a:solidFill>
                   <a:srgbClr val="B8985A"/>
                 </a:solidFill>
@@ -1910,12 +2003,12 @@
             </a:r>
             <a:pPr indent="0" marL="0">
               <a:lnSpc>
-                <a:spcPts val="1150"/>
-              </a:lnSpc>
-              <a:buNone/>
-            </a:pPr>
-            <a:r>
-              <a:rPr lang="en-US" sz="900" i="1" dirty="0">
+                <a:spcPts val="1100"/>
+              </a:lnSpc>
+              <a:buNone/>
+            </a:pPr>
+            <a:r>
+              <a:rPr lang="en-US" sz="880" i="1" dirty="0">
                 <a:solidFill>
                   <a:srgbClr val="232B3A"/>
                 </a:solidFill>
@@ -1923,16 +2016,16 @@
                 <a:ea typeface="Calibri" pitchFamily="34" charset="-122"/>
                 <a:cs typeface="Calibri" pitchFamily="34" charset="-120"/>
               </a:rPr>
-              <a:t>“Que número faria vocês dizerem ‘aprovado, vamos investir’?”</a:t>
-            </a:r>
-            <a:pPr indent="0" marL="0">
-              <a:lnSpc>
-                <a:spcPts val="1150"/>
-              </a:lnSpc>
-              <a:buNone/>
-            </a:pPr>
-            <a:r>
-              <a:rPr lang="en-US" sz="850" dirty="0">
+              <a:t>“Que erro seria INACEITÁVEL? E qual é tolerável, se pego na revisão?”</a:t>
+            </a:r>
+            <a:pPr indent="0" marL="0">
+              <a:lnSpc>
+                <a:spcPts val="1100"/>
+              </a:lnSpc>
+              <a:buNone/>
+            </a:pPr>
+            <a:r>
+              <a:rPr lang="en-US" sz="820" dirty="0">
                 <a:solidFill>
                   <a:srgbClr val="5A6472"/>
                 </a:solidFill>
@@ -1940,41 +2033,41 @@
                 <a:ea typeface="Calibri" pitchFamily="34" charset="-122"/>
                 <a:cs typeface="Calibri" pitchFamily="34" charset="-120"/>
               </a:rPr>
-              <a:t>  a meta que define GO — combinada ANTES</a:t>
-            </a:r>
-            <a:endParaRPr lang="en-US" sz="900" dirty="0"/>
-          </a:p>
-        </p:txBody>
-      </p:sp>
-      <p:sp>
-        <p:nvSpPr>
-          <p:cNvPr id="21" name="Text 19"/>
-          <p:cNvSpPr/>
-          <p:nvPr/>
-        </p:nvSpPr>
-        <p:spPr>
-          <a:xfrm>
-            <a:off x="1024128" y="5495544"/>
-            <a:ext cx="5971032" cy="237744"/>
-          </a:xfrm>
-          <a:prstGeom prst="rect">
-            <a:avLst/>
-          </a:prstGeom>
-          <a:noFill/>
-          <a:ln/>
-        </p:spPr>
-        <p:txBody>
-          <a:bodyPr wrap="square" lIns="0" tIns="0" rIns="0" bIns="0" rtlCol="0" anchor="ctr"/>
-          <a:lstStyle/>
-          <a:p>
-            <a:pPr indent="0" marL="0">
-              <a:lnSpc>
-                <a:spcPts val="1150"/>
-              </a:lnSpc>
-              <a:buNone/>
-            </a:pPr>
-            <a:r>
-              <a:rPr lang="en-US" sz="900" b="1" dirty="0">
+              <a:t>  define onde vai a aprovação humana</a:t>
+            </a:r>
+            <a:endParaRPr lang="en-US" sz="880" dirty="0"/>
+          </a:p>
+        </p:txBody>
+      </p:sp>
+      <p:sp>
+        <p:nvSpPr>
+          <p:cNvPr id="22" name="Text 20"/>
+          <p:cNvSpPr/>
+          <p:nvPr/>
+        </p:nvSpPr>
+        <p:spPr>
+          <a:xfrm>
+            <a:off x="950976" y="5367528"/>
+            <a:ext cx="6080760" cy="219456"/>
+          </a:xfrm>
+          <a:prstGeom prst="rect">
+            <a:avLst/>
+          </a:prstGeom>
+          <a:noFill/>
+          <a:ln/>
+        </p:spPr>
+        <p:txBody>
+          <a:bodyPr wrap="square" lIns="0" tIns="0" rIns="0" bIns="0" rtlCol="0" anchor="ctr"/>
+          <a:lstStyle/>
+          <a:p>
+            <a:pPr indent="0" marL="0">
+              <a:lnSpc>
+                <a:spcPts val="1100"/>
+              </a:lnSpc>
+              <a:buNone/>
+            </a:pPr>
+            <a:r>
+              <a:rPr lang="en-US" sz="880" b="1" dirty="0">
                 <a:solidFill>
                   <a:srgbClr val="B8985A"/>
                 </a:solidFill>
@@ -1986,12 +2079,12 @@
             </a:r>
             <a:pPr indent="0" marL="0">
               <a:lnSpc>
-                <a:spcPts val="1150"/>
-              </a:lnSpc>
-              <a:buNone/>
-            </a:pPr>
-            <a:r>
-              <a:rPr lang="en-US" sz="900" i="1" dirty="0">
+                <a:spcPts val="1100"/>
+              </a:lnSpc>
+              <a:buNone/>
+            </a:pPr>
+            <a:r>
+              <a:rPr lang="en-US" sz="880" i="1" dirty="0">
                 <a:solidFill>
                   <a:srgbClr val="232B3A"/>
                 </a:solidFill>
@@ -1999,22 +2092,22 @@
                 <a:ea typeface="Calibri" pitchFamily="34" charset="-122"/>
                 <a:cs typeface="Calibri" pitchFamily="34" charset="-120"/>
               </a:rPr>
-              <a:t>“Quem aqui bate o martelo de que funcionou?”</a:t>
-            </a:r>
-            <a:endParaRPr lang="en-US" sz="900" dirty="0"/>
-          </a:p>
-        </p:txBody>
-      </p:sp>
-      <p:sp>
-        <p:nvSpPr>
-          <p:cNvPr id="22" name="Shape 20"/>
-          <p:cNvSpPr/>
-          <p:nvPr/>
-        </p:nvSpPr>
-        <p:spPr>
-          <a:xfrm>
-            <a:off x="1024128" y="5811012"/>
-            <a:ext cx="5971032" cy="0"/>
+              <a:t>“Quem bate o martelo de que funcionou?”</a:t>
+            </a:r>
+            <a:endParaRPr lang="en-US" sz="880" dirty="0"/>
+          </a:p>
+        </p:txBody>
+      </p:sp>
+      <p:sp>
+        <p:nvSpPr>
+          <p:cNvPr id="23" name="Shape 21"/>
+          <p:cNvSpPr/>
+          <p:nvPr/>
+        </p:nvSpPr>
+        <p:spPr>
+          <a:xfrm>
+            <a:off x="950976" y="5650992"/>
+            <a:ext cx="6080760" cy="0"/>
           </a:xfrm>
           <a:prstGeom prst="line">
             <a:avLst/>
@@ -2030,13 +2123,13 @@
       </p:sp>
       <p:sp>
         <p:nvSpPr>
-          <p:cNvPr id="23" name="Text 21"/>
-          <p:cNvSpPr/>
-          <p:nvPr/>
-        </p:nvSpPr>
-        <p:spPr>
-          <a:xfrm>
-            <a:off x="521208" y="5875020"/>
+          <p:cNvPr id="24" name="Text 22"/>
+          <p:cNvSpPr/>
+          <p:nvPr/>
+        </p:nvSpPr>
+        <p:spPr>
+          <a:xfrm>
+            <a:off x="484632" y="5705856"/>
             <a:ext cx="457200" cy="457200"/>
           </a:xfrm>
           <a:prstGeom prst="rect">
@@ -2053,7 +2146,7 @@
               <a:buNone/>
             </a:pPr>
             <a:r>
-              <a:rPr lang="en-US" sz="2100" b="1" dirty="0">
+              <a:rPr lang="en-US" sz="2000" b="1" dirty="0">
                 <a:solidFill>
                   <a:srgbClr val="B8985A"/>
                 </a:solidFill>
@@ -2063,36 +2156,36 @@
               </a:rPr>
               <a:t>3</a:t>
             </a:r>
-            <a:endParaRPr lang="en-US" sz="2100" dirty="0"/>
-          </a:p>
-        </p:txBody>
-      </p:sp>
-      <p:sp>
-        <p:nvSpPr>
-          <p:cNvPr id="24" name="Text 22"/>
-          <p:cNvSpPr/>
-          <p:nvPr/>
-        </p:nvSpPr>
-        <p:spPr>
-          <a:xfrm>
-            <a:off x="1024128" y="5929884"/>
-            <a:ext cx="5971032" cy="237744"/>
-          </a:xfrm>
-          <a:prstGeom prst="rect">
-            <a:avLst/>
-          </a:prstGeom>
-          <a:noFill/>
-          <a:ln/>
-        </p:spPr>
-        <p:txBody>
-          <a:bodyPr wrap="square" lIns="0" tIns="0" rIns="0" bIns="0" rtlCol="0" anchor="ctr"/>
-          <a:lstStyle/>
-          <a:p>
-            <a:pPr indent="0" marL="0">
-              <a:buNone/>
-            </a:pPr>
-            <a:r>
-              <a:rPr lang="en-US" sz="1250" b="1" dirty="0">
+            <a:endParaRPr lang="en-US" sz="2000" dirty="0"/>
+          </a:p>
+        </p:txBody>
+      </p:sp>
+      <p:sp>
+        <p:nvSpPr>
+          <p:cNvPr id="25" name="Text 23"/>
+          <p:cNvSpPr/>
+          <p:nvPr/>
+        </p:nvSpPr>
+        <p:spPr>
+          <a:xfrm>
+            <a:off x="950976" y="5760720"/>
+            <a:ext cx="6080760" cy="228600"/>
+          </a:xfrm>
+          <a:prstGeom prst="rect">
+            <a:avLst/>
+          </a:prstGeom>
+          <a:noFill/>
+          <a:ln/>
+        </p:spPr>
+        <p:txBody>
+          <a:bodyPr wrap="square" lIns="0" tIns="0" rIns="0" bIns="0" rtlCol="0" anchor="ctr"/>
+          <a:lstStyle/>
+          <a:p>
+            <a:pPr indent="0" marL="0">
+              <a:buNone/>
+            </a:pPr>
+            <a:r>
+              <a:rPr lang="en-US" sz="1200" b="1" dirty="0">
                 <a:solidFill>
                   <a:srgbClr val="1B2A4A"/>
                 </a:solidFill>
@@ -2100,13 +2193,13 @@
                 <a:ea typeface="Cambria" pitchFamily="34" charset="-122"/>
                 <a:cs typeface="Cambria" pitchFamily="34" charset="-120"/>
               </a:rPr>
-              <a:t>Os sistemas</a:t>
-            </a:r>
-            <a:pPr indent="0" marL="0">
-              <a:buNone/>
-            </a:pPr>
-            <a:r>
-              <a:rPr lang="en-US" sz="850" dirty="0">
+              <a:t>A inteligência do trabalho</a:t>
+            </a:r>
+            <a:pPr indent="0" marL="0">
+              <a:buNone/>
+            </a:pPr>
+            <a:r>
+              <a:rPr lang="en-US" sz="800" dirty="0">
                 <a:solidFill>
                   <a:srgbClr val="5A6472"/>
                 </a:solidFill>
@@ -2114,41 +2207,41 @@
                 <a:ea typeface="Calibri" pitchFamily="34" charset="-122"/>
                 <a:cs typeface="Calibri" pitchFamily="34" charset="-120"/>
               </a:rPr>
-              <a:t>   · 10 min</a:t>
-            </a:r>
-            <a:endParaRPr lang="en-US" sz="1250" dirty="0"/>
-          </a:p>
-        </p:txBody>
-      </p:sp>
-      <p:sp>
-        <p:nvSpPr>
-          <p:cNvPr id="25" name="Text 23"/>
-          <p:cNvSpPr/>
-          <p:nvPr/>
-        </p:nvSpPr>
-        <p:spPr>
-          <a:xfrm>
-            <a:off x="1024128" y="6204204"/>
-            <a:ext cx="5971032" cy="256032"/>
-          </a:xfrm>
-          <a:prstGeom prst="rect">
-            <a:avLst/>
-          </a:prstGeom>
-          <a:noFill/>
-          <a:ln/>
-        </p:spPr>
-        <p:txBody>
-          <a:bodyPr wrap="square" lIns="0" tIns="0" rIns="0" bIns="0" rtlCol="0" anchor="ctr"/>
-          <a:lstStyle/>
-          <a:p>
-            <a:pPr indent="0" marL="0">
-              <a:lnSpc>
-                <a:spcPts val="1150"/>
-              </a:lnSpc>
-              <a:buNone/>
-            </a:pPr>
-            <a:r>
-              <a:rPr lang="en-US" sz="900" b="1" dirty="0">
+              <a:t>   · 10 min · O QUE DESENHA A SOLUÇÃO</a:t>
+            </a:r>
+            <a:endParaRPr lang="en-US" sz="1200" dirty="0"/>
+          </a:p>
+        </p:txBody>
+      </p:sp>
+      <p:sp>
+        <p:nvSpPr>
+          <p:cNvPr id="26" name="Text 24"/>
+          <p:cNvSpPr/>
+          <p:nvPr/>
+        </p:nvSpPr>
+        <p:spPr>
+          <a:xfrm>
+            <a:off x="950976" y="6025896"/>
+            <a:ext cx="6080760" cy="475488"/>
+          </a:xfrm>
+          <a:prstGeom prst="rect">
+            <a:avLst/>
+          </a:prstGeom>
+          <a:noFill/>
+          <a:ln/>
+        </p:spPr>
+        <p:txBody>
+          <a:bodyPr wrap="square" lIns="0" tIns="0" rIns="0" bIns="0" rtlCol="0" anchor="ctr"/>
+          <a:lstStyle/>
+          <a:p>
+            <a:pPr indent="0" marL="0">
+              <a:lnSpc>
+                <a:spcPts val="1100"/>
+              </a:lnSpc>
+              <a:buNone/>
+            </a:pPr>
+            <a:r>
+              <a:rPr lang="en-US" sz="880" b="1" dirty="0">
                 <a:solidFill>
                   <a:srgbClr val="B8985A"/>
                 </a:solidFill>
@@ -2160,12 +2253,12 @@
             </a:r>
             <a:pPr indent="0" marL="0">
               <a:lnSpc>
-                <a:spcPts val="1150"/>
-              </a:lnSpc>
-              <a:buNone/>
-            </a:pPr>
-            <a:r>
-              <a:rPr lang="en-US" sz="900" i="1" dirty="0">
+                <a:spcPts val="1100"/>
+              </a:lnSpc>
+              <a:buNone/>
+            </a:pPr>
+            <a:r>
+              <a:rPr lang="en-US" sz="880" i="1" dirty="0">
                 <a:solidFill>
                   <a:srgbClr val="232B3A"/>
                 </a:solidFill>
@@ -2173,16 +2266,16 @@
                 <a:ea typeface="Calibri" pitchFamily="34" charset="-122"/>
                 <a:cs typeface="Calibri" pitchFamily="34" charset="-120"/>
               </a:rPr>
-              <a:t>“Onde esse processo mora — que sistemas, planilhas, ferramentas?”</a:t>
-            </a:r>
-            <a:pPr indent="0" marL="0">
-              <a:lnSpc>
-                <a:spcPts val="1150"/>
-              </a:lnSpc>
-              <a:buNone/>
-            </a:pPr>
-            <a:r>
-              <a:rPr lang="en-US" sz="850" dirty="0">
+              <a:t>“Se eu colocasse aqui amanhã um estagiário brilhante, sem experiência da casa: o que diriam para ele fazer, em que ordem? E o que ele ERRARIA no primeiro mês — por quê?”</a:t>
+            </a:r>
+            <a:pPr indent="0" marL="0">
+              <a:lnSpc>
+                <a:spcPts val="1100"/>
+              </a:lnSpc>
+              <a:buNone/>
+            </a:pPr>
+            <a:r>
+              <a:rPr lang="en-US" sz="820" dirty="0">
                 <a:solidFill>
                   <a:srgbClr val="5A6472"/>
                 </a:solidFill>
@@ -2190,41 +2283,41 @@
                 <a:ea typeface="Calibri" pitchFamily="34" charset="-122"/>
                 <a:cs typeface="Calibri" pitchFamily="34" charset="-120"/>
               </a:rPr>
-              <a:t>  nome e versão: ERP, CRM, próprio, Excel, e-mail, WhatsApp</a:t>
-            </a:r>
-            <a:endParaRPr lang="en-US" sz="900" dirty="0"/>
-          </a:p>
-        </p:txBody>
-      </p:sp>
-      <p:sp>
-        <p:nvSpPr>
-          <p:cNvPr id="26" name="Text 24"/>
-          <p:cNvSpPr/>
-          <p:nvPr/>
-        </p:nvSpPr>
-        <p:spPr>
-          <a:xfrm>
-            <a:off x="1024128" y="6501384"/>
-            <a:ext cx="5971032" cy="237744"/>
-          </a:xfrm>
-          <a:prstGeom prst="rect">
-            <a:avLst/>
-          </a:prstGeom>
-          <a:noFill/>
-          <a:ln/>
-        </p:spPr>
-        <p:txBody>
-          <a:bodyPr wrap="square" lIns="0" tIns="0" rIns="0" bIns="0" rtlCol="0" anchor="ctr"/>
-          <a:lstStyle/>
-          <a:p>
-            <a:pPr indent="0" marL="0">
-              <a:lnSpc>
-                <a:spcPts val="1150"/>
-              </a:lnSpc>
-              <a:buNone/>
-            </a:pPr>
-            <a:r>
-              <a:rPr lang="en-US" sz="900" b="1" dirty="0">
+              <a:t>  o que erraria = o conhecimento tácito que vira instrução, exemplo ou revisão</a:t>
+            </a:r>
+            <a:endParaRPr lang="en-US" sz="880" dirty="0"/>
+          </a:p>
+        </p:txBody>
+      </p:sp>
+      <p:sp>
+        <p:nvSpPr>
+          <p:cNvPr id="27" name="Text 25"/>
+          <p:cNvSpPr/>
+          <p:nvPr/>
+        </p:nvSpPr>
+        <p:spPr>
+          <a:xfrm>
+            <a:off x="950976" y="6537960"/>
+            <a:ext cx="6080760" cy="365760"/>
+          </a:xfrm>
+          <a:prstGeom prst="rect">
+            <a:avLst/>
+          </a:prstGeom>
+          <a:noFill/>
+          <a:ln/>
+        </p:spPr>
+        <p:txBody>
+          <a:bodyPr wrap="square" lIns="0" tIns="0" rIns="0" bIns="0" rtlCol="0" anchor="ctr"/>
+          <a:lstStyle/>
+          <a:p>
+            <a:pPr indent="0" marL="0">
+              <a:lnSpc>
+                <a:spcPts val="1100"/>
+              </a:lnSpc>
+              <a:buNone/>
+            </a:pPr>
+            <a:r>
+              <a:rPr lang="en-US" sz="880" b="1" dirty="0">
                 <a:solidFill>
                   <a:srgbClr val="B8985A"/>
                 </a:solidFill>
@@ -2236,12 +2329,12 @@
             </a:r>
             <a:pPr indent="0" marL="0">
               <a:lnSpc>
-                <a:spcPts val="1150"/>
-              </a:lnSpc>
-              <a:buNone/>
-            </a:pPr>
-            <a:r>
-              <a:rPr lang="en-US" sz="900" i="1" dirty="0">
+                <a:spcPts val="1100"/>
+              </a:lnSpc>
+              <a:buNone/>
+            </a:pPr>
+            <a:r>
+              <a:rPr lang="en-US" sz="880" i="1" dirty="0">
                 <a:solidFill>
                   <a:srgbClr val="232B3A"/>
                 </a:solidFill>
@@ -2249,41 +2342,58 @@
                 <a:ea typeface="Calibri" pitchFamily="34" charset="-122"/>
                 <a:cs typeface="Calibri" pitchFamily="34" charset="-120"/>
               </a:rPr>
-              <a:t>“Na nuvem ou no servidor de vocês?”</a:t>
-            </a:r>
-            <a:endParaRPr lang="en-US" sz="900" dirty="0"/>
-          </a:p>
-        </p:txBody>
-      </p:sp>
-      <p:sp>
-        <p:nvSpPr>
-          <p:cNvPr id="27" name="Text 25"/>
-          <p:cNvSpPr/>
-          <p:nvPr/>
-        </p:nvSpPr>
-        <p:spPr>
-          <a:xfrm>
-            <a:off x="1024128" y="6780276"/>
-            <a:ext cx="5971032" cy="365760"/>
-          </a:xfrm>
-          <a:prstGeom prst="rect">
-            <a:avLst/>
-          </a:prstGeom>
-          <a:noFill/>
-          <a:ln/>
-        </p:spPr>
-        <p:txBody>
-          <a:bodyPr wrap="square" lIns="0" tIns="0" rIns="0" bIns="0" rtlCol="0" anchor="ctr"/>
-          <a:lstStyle/>
-          <a:p>
-            <a:pPr indent="0" marL="0">
-              <a:lnSpc>
-                <a:spcPts val="1150"/>
-              </a:lnSpc>
-              <a:buNone/>
-            </a:pPr>
-            <a:r>
-              <a:rPr lang="en-US" sz="900" b="1" dirty="0">
+              <a:t>“Onde está ESCRITO como fazer certo — manual, política, tabela, catálogo, histórico? E o que só existe na cabeça de alguém?”</a:t>
+            </a:r>
+            <a:pPr indent="0" marL="0">
+              <a:lnSpc>
+                <a:spcPts val="1100"/>
+              </a:lnSpc>
+              <a:buNone/>
+            </a:pPr>
+            <a:r>
+              <a:rPr lang="en-US" sz="820" dirty="0">
+                <a:solidFill>
+                  <a:srgbClr val="5A6472"/>
+                </a:solidFill>
+                <a:latin typeface="Calibri" pitchFamily="34" charset="0"/>
+                <a:ea typeface="Calibri" pitchFamily="34" charset="-122"/>
+                <a:cs typeface="Calibri" pitchFamily="34" charset="-120"/>
+              </a:rPr>
+              <a:t>  a base de consulta da solução</a:t>
+            </a:r>
+            <a:endParaRPr lang="en-US" sz="880" dirty="0"/>
+          </a:p>
+        </p:txBody>
+      </p:sp>
+      <p:sp>
+        <p:nvSpPr>
+          <p:cNvPr id="28" name="Text 26"/>
+          <p:cNvSpPr/>
+          <p:nvPr/>
+        </p:nvSpPr>
+        <p:spPr>
+          <a:xfrm>
+            <a:off x="950976" y="6940296"/>
+            <a:ext cx="6080760" cy="237744"/>
+          </a:xfrm>
+          <a:prstGeom prst="rect">
+            <a:avLst/>
+          </a:prstGeom>
+          <a:noFill/>
+          <a:ln/>
+        </p:spPr>
+        <p:txBody>
+          <a:bodyPr wrap="square" lIns="0" tIns="0" rIns="0" bIns="0" rtlCol="0" anchor="ctr"/>
+          <a:lstStyle/>
+          <a:p>
+            <a:pPr indent="0" marL="0">
+              <a:lnSpc>
+                <a:spcPts val="1100"/>
+              </a:lnSpc>
+              <a:buNone/>
+            </a:pPr>
+            <a:r>
+              <a:rPr lang="en-US" sz="880" b="1" dirty="0">
                 <a:solidFill>
                   <a:srgbClr val="B8985A"/>
                 </a:solidFill>
@@ -2295,12 +2405,12 @@
             </a:r>
             <a:pPr indent="0" marL="0">
               <a:lnSpc>
-                <a:spcPts val="1150"/>
-              </a:lnSpc>
-              <a:buNone/>
-            </a:pPr>
-            <a:r>
-              <a:rPr lang="en-US" sz="900" i="1" dirty="0">
+                <a:spcPts val="1100"/>
+              </a:lnSpc>
+              <a:buNone/>
+            </a:pPr>
+            <a:r>
+              <a:rPr lang="en-US" sz="880" i="1" dirty="0">
                 <a:solidFill>
                   <a:srgbClr val="232B3A"/>
                 </a:solidFill>
@@ -2308,58 +2418,41 @@
                 <a:ea typeface="Calibri" pitchFamily="34" charset="-122"/>
                 <a:cs typeface="Calibri" pitchFamily="34" charset="-120"/>
               </a:rPr>
-              <a:t>“Como a informação entra e sai de cada um — digitação, relatório exportado, integração automática?”</a:t>
-            </a:r>
-            <a:pPr indent="0" marL="0">
-              <a:lnSpc>
-                <a:spcPts val="1150"/>
-              </a:lnSpc>
-              <a:buNone/>
-            </a:pPr>
-            <a:r>
-              <a:rPr lang="en-US" sz="850" dirty="0">
-                <a:solidFill>
-                  <a:srgbClr val="5A6472"/>
-                </a:solidFill>
-                <a:latin typeface="Calibri" pitchFamily="34" charset="0"/>
-                <a:ea typeface="Calibri" pitchFamily="34" charset="-122"/>
-                <a:cs typeface="Calibri" pitchFamily="34" charset="-120"/>
-              </a:rPr>
-              <a:t>  API = a ‘tomada’ que liga sistemas</a:t>
-            </a:r>
-            <a:endParaRPr lang="en-US" sz="900" dirty="0"/>
-          </a:p>
-        </p:txBody>
-      </p:sp>
-      <p:sp>
-        <p:nvSpPr>
-          <p:cNvPr id="28" name="Text 26"/>
-          <p:cNvSpPr/>
-          <p:nvPr/>
-        </p:nvSpPr>
-        <p:spPr>
-          <a:xfrm>
-            <a:off x="1024128" y="7187184"/>
-            <a:ext cx="5971032" cy="237744"/>
-          </a:xfrm>
-          <a:prstGeom prst="rect">
-            <a:avLst/>
-          </a:prstGeom>
-          <a:noFill/>
-          <a:ln/>
-        </p:spPr>
-        <p:txBody>
-          <a:bodyPr wrap="square" lIns="0" tIns="0" rIns="0" bIns="0" rtlCol="0" anchor="ctr"/>
-          <a:lstStyle/>
-          <a:p>
-            <a:pPr indent="0" marL="0">
-              <a:lnSpc>
-                <a:spcPts val="1150"/>
-              </a:lnSpc>
-              <a:buNone/>
-            </a:pPr>
-            <a:r>
-              <a:rPr lang="en-US" sz="900" b="1" dirty="0">
+              <a:t>“Quais passos são ‘seguir regra’ — e quais têm decisão de verdade?”</a:t>
+            </a:r>
+            <a:endParaRPr lang="en-US" sz="880" dirty="0"/>
+          </a:p>
+        </p:txBody>
+      </p:sp>
+      <p:sp>
+        <p:nvSpPr>
+          <p:cNvPr id="29" name="Text 27"/>
+          <p:cNvSpPr/>
+          <p:nvPr/>
+        </p:nvSpPr>
+        <p:spPr>
+          <a:xfrm>
+            <a:off x="950976" y="7214616"/>
+            <a:ext cx="6080760" cy="256032"/>
+          </a:xfrm>
+          <a:prstGeom prst="rect">
+            <a:avLst/>
+          </a:prstGeom>
+          <a:noFill/>
+          <a:ln/>
+        </p:spPr>
+        <p:txBody>
+          <a:bodyPr wrap="square" lIns="0" tIns="0" rIns="0" bIns="0" rtlCol="0" anchor="ctr"/>
+          <a:lstStyle/>
+          <a:p>
+            <a:pPr indent="0" marL="0">
+              <a:lnSpc>
+                <a:spcPts val="1100"/>
+              </a:lnSpc>
+              <a:buNone/>
+            </a:pPr>
+            <a:r>
+              <a:rPr lang="en-US" sz="880" b="1" dirty="0">
                 <a:solidFill>
                   <a:srgbClr val="B8985A"/>
                 </a:solidFill>
@@ -2371,12 +2464,12 @@
             </a:r>
             <a:pPr indent="0" marL="0">
               <a:lnSpc>
-                <a:spcPts val="1150"/>
-              </a:lnSpc>
-              <a:buNone/>
-            </a:pPr>
-            <a:r>
-              <a:rPr lang="en-US" sz="900" i="1" dirty="0">
+                <a:spcPts val="1100"/>
+              </a:lnSpc>
+              <a:buNone/>
+            </a:pPr>
+            <a:r>
+              <a:rPr lang="en-US" sz="880" i="1" dirty="0">
                 <a:solidFill>
                   <a:srgbClr val="232B3A"/>
                 </a:solidFill>
@@ -2384,39 +2477,22 @@
                 <a:ea typeface="Calibri" pitchFamily="34" charset="-122"/>
                 <a:cs typeface="Calibri" pitchFamily="34" charset="-120"/>
               </a:rPr>
-              <a:t>“Quem administra — TI interna, fornecedor, terceirizada?”</a:t>
-            </a:r>
-            <a:pPr indent="0" marL="0">
-              <a:lnSpc>
-                <a:spcPts val="1150"/>
-              </a:lnSpc>
-              <a:buNone/>
-            </a:pPr>
-            <a:r>
-              <a:rPr lang="en-US" sz="850" dirty="0">
-                <a:solidFill>
-                  <a:srgbClr val="5A6472"/>
-                </a:solidFill>
-                <a:latin typeface="Calibri" pitchFamily="34" charset="0"/>
-                <a:ea typeface="Calibri" pitchFamily="34" charset="-122"/>
-                <a:cs typeface="Calibri" pitchFamily="34" charset="-120"/>
-              </a:rPr>
-              <a:t>  é de quem virá o acesso</a:t>
-            </a:r>
-            <a:endParaRPr lang="en-US" sz="900" dirty="0"/>
-          </a:p>
-        </p:txBody>
-      </p:sp>
-      <p:sp>
-        <p:nvSpPr>
-          <p:cNvPr id="29" name="Shape 27"/>
-          <p:cNvSpPr/>
-          <p:nvPr/>
-        </p:nvSpPr>
-        <p:spPr>
-          <a:xfrm>
-            <a:off x="566928" y="10241280"/>
-            <a:ext cx="6428232" cy="0"/>
+              <a:t>“Como vocês reconhecem um resultado BEM feito — e um que parece certo mas está errado?”</a:t>
+            </a:r>
+            <a:endParaRPr lang="en-US" sz="880" dirty="0"/>
+          </a:p>
+        </p:txBody>
+      </p:sp>
+      <p:sp>
+        <p:nvSpPr>
+          <p:cNvPr id="30" name="Shape 28"/>
+          <p:cNvSpPr/>
+          <p:nvPr/>
+        </p:nvSpPr>
+        <p:spPr>
+          <a:xfrm>
+            <a:off x="530352" y="10259568"/>
+            <a:ext cx="6501384" cy="0"/>
           </a:xfrm>
           <a:prstGeom prst="line">
             <a:avLst/>
@@ -2432,13 +2508,13 @@
       </p:sp>
       <p:sp>
         <p:nvSpPr>
-          <p:cNvPr id="30" name="Text 28"/>
-          <p:cNvSpPr/>
-          <p:nvPr/>
-        </p:nvSpPr>
-        <p:spPr>
-          <a:xfrm>
-            <a:off x="566928" y="10314432"/>
+          <p:cNvPr id="31" name="Text 29"/>
+          <p:cNvSpPr/>
+          <p:nvPr/>
+        </p:nvSpPr>
+        <p:spPr>
+          <a:xfrm>
+            <a:off x="530352" y="10332720"/>
             <a:ext cx="4754880" cy="182880"/>
           </a:xfrm>
           <a:prstGeom prst="rect">
@@ -2471,13 +2547,13 @@
       </p:sp>
       <p:sp>
         <p:nvSpPr>
-          <p:cNvPr id="31" name="Text 29"/>
-          <p:cNvSpPr/>
-          <p:nvPr/>
-        </p:nvSpPr>
-        <p:spPr>
-          <a:xfrm>
-            <a:off x="5166360" y="10314432"/>
+          <p:cNvPr id="32" name="Text 30"/>
+          <p:cNvSpPr/>
+          <p:nvPr/>
+        </p:nvSpPr>
+        <p:spPr>
+          <a:xfrm>
+            <a:off x="5202936" y="10332720"/>
             <a:ext cx="1828800" cy="182880"/>
           </a:xfrm>
           <a:prstGeom prst="rect">
@@ -2548,7 +2624,7 @@
         </p:nvSpPr>
         <p:spPr>
           <a:xfrm>
-            <a:off x="521208" y="402336"/>
+            <a:off x="484632" y="356616"/>
             <a:ext cx="457200" cy="457200"/>
           </a:xfrm>
           <a:prstGeom prst="rect">
@@ -2565,7 +2641,7 @@
               <a:buNone/>
             </a:pPr>
             <a:r>
-              <a:rPr lang="en-US" sz="2100" b="1" dirty="0">
+              <a:rPr lang="en-US" sz="2000" b="1" dirty="0">
                 <a:solidFill>
                   <a:srgbClr val="B8985A"/>
                 </a:solidFill>
@@ -2575,7 +2651,7 @@
               </a:rPr>
               <a:t>4</a:t>
             </a:r>
-            <a:endParaRPr lang="en-US" sz="2100" dirty="0"/>
+            <a:endParaRPr lang="en-US" sz="2000" dirty="0"/>
           </a:p>
         </p:txBody>
       </p:sp>
@@ -2587,24 +2663,24 @@
         </p:nvSpPr>
         <p:spPr>
           <a:xfrm>
-            <a:off x="1024128" y="457200"/>
-            <a:ext cx="5971032" cy="237744"/>
-          </a:xfrm>
-          <a:prstGeom prst="rect">
-            <a:avLst/>
-          </a:prstGeom>
-          <a:noFill/>
-          <a:ln/>
-        </p:spPr>
-        <p:txBody>
-          <a:bodyPr wrap="square" lIns="0" tIns="0" rIns="0" bIns="0" rtlCol="0" anchor="ctr"/>
-          <a:lstStyle/>
-          <a:p>
-            <a:pPr indent="0" marL="0">
-              <a:buNone/>
-            </a:pPr>
-            <a:r>
-              <a:rPr lang="en-US" sz="1250" b="1" dirty="0">
+            <a:off x="950976" y="411480"/>
+            <a:ext cx="6080760" cy="228600"/>
+          </a:xfrm>
+          <a:prstGeom prst="rect">
+            <a:avLst/>
+          </a:prstGeom>
+          <a:noFill/>
+          <a:ln/>
+        </p:spPr>
+        <p:txBody>
+          <a:bodyPr wrap="square" lIns="0" tIns="0" rIns="0" bIns="0" rtlCol="0" anchor="ctr"/>
+          <a:lstStyle/>
+          <a:p>
+            <a:pPr indent="0" marL="0">
+              <a:buNone/>
+            </a:pPr>
+            <a:r>
+              <a:rPr lang="en-US" sz="1200" b="1" dirty="0">
                 <a:solidFill>
                   <a:srgbClr val="1B2A4A"/>
                 </a:solidFill>
@@ -2612,13 +2688,13 @@
                 <a:ea typeface="Cambria" pitchFamily="34" charset="-122"/>
                 <a:cs typeface="Cambria" pitchFamily="34" charset="-120"/>
               </a:rPr>
-              <a:t>Os dados</a:t>
-            </a:r>
-            <a:pPr indent="0" marL="0">
-              <a:buNone/>
-            </a:pPr>
-            <a:r>
-              <a:rPr lang="en-US" sz="850" dirty="0">
+              <a:t>Os sistemas e o destino</a:t>
+            </a:r>
+            <a:pPr indent="0" marL="0">
+              <a:buNone/>
+            </a:pPr>
+            <a:r>
+              <a:rPr lang="en-US" sz="800" dirty="0">
                 <a:solidFill>
                   <a:srgbClr val="5A6472"/>
                 </a:solidFill>
@@ -2626,9 +2702,9 @@
                 <a:ea typeface="Calibri" pitchFamily="34" charset="-122"/>
                 <a:cs typeface="Calibri" pitchFamily="34" charset="-120"/>
               </a:rPr>
-              <a:t>   · 10 min</a:t>
-            </a:r>
-            <a:endParaRPr lang="en-US" sz="1250" dirty="0"/>
+              <a:t>   · 8 min</a:t>
+            </a:r>
+            <a:endParaRPr lang="en-US" sz="1200" dirty="0"/>
           </a:p>
         </p:txBody>
       </p:sp>
@@ -2640,27 +2716,27 @@
         </p:nvSpPr>
         <p:spPr>
           <a:xfrm>
-            <a:off x="1024128" y="731520"/>
-            <a:ext cx="5971032" cy="256032"/>
-          </a:xfrm>
-          <a:prstGeom prst="rect">
-            <a:avLst/>
-          </a:prstGeom>
-          <a:noFill/>
-          <a:ln/>
-        </p:spPr>
-        <p:txBody>
-          <a:bodyPr wrap="square" lIns="0" tIns="0" rIns="0" bIns="0" rtlCol="0" anchor="ctr"/>
-          <a:lstStyle/>
-          <a:p>
-            <a:pPr indent="0" marL="0">
-              <a:lnSpc>
-                <a:spcPts val="1150"/>
-              </a:lnSpc>
-              <a:buNone/>
-            </a:pPr>
-            <a:r>
-              <a:rPr lang="en-US" sz="900" b="1" dirty="0">
+            <a:off x="950976" y="676656"/>
+            <a:ext cx="6080760" cy="256032"/>
+          </a:xfrm>
+          <a:prstGeom prst="rect">
+            <a:avLst/>
+          </a:prstGeom>
+          <a:noFill/>
+          <a:ln/>
+        </p:spPr>
+        <p:txBody>
+          <a:bodyPr wrap="square" lIns="0" tIns="0" rIns="0" bIns="0" rtlCol="0" anchor="ctr"/>
+          <a:lstStyle/>
+          <a:p>
+            <a:pPr indent="0" marL="0">
+              <a:lnSpc>
+                <a:spcPts val="1100"/>
+              </a:lnSpc>
+              <a:buNone/>
+            </a:pPr>
+            <a:r>
+              <a:rPr lang="en-US" sz="880" b="1" dirty="0">
                 <a:solidFill>
                   <a:srgbClr val="B8985A"/>
                 </a:solidFill>
@@ -2672,12 +2748,12 @@
             </a:r>
             <a:pPr indent="0" marL="0">
               <a:lnSpc>
-                <a:spcPts val="1150"/>
-              </a:lnSpc>
-              <a:buNone/>
-            </a:pPr>
-            <a:r>
-              <a:rPr lang="en-US" sz="900" i="1" dirty="0">
+                <a:spcPts val="1100"/>
+              </a:lnSpc>
+              <a:buNone/>
+            </a:pPr>
+            <a:r>
+              <a:rPr lang="en-US" sz="880" i="1" dirty="0">
                 <a:solidFill>
                   <a:srgbClr val="232B3A"/>
                 </a:solidFill>
@@ -2685,16 +2761,16 @@
                 <a:ea typeface="Calibri" pitchFamily="34" charset="-122"/>
                 <a:cs typeface="Calibri" pitchFamily="34" charset="-120"/>
               </a:rPr>
-              <a:t>“Que documentos e dados o processo usa e produz?”</a:t>
-            </a:r>
-            <a:pPr indent="0" marL="0">
-              <a:lnSpc>
-                <a:spcPts val="1150"/>
-              </a:lnSpc>
-              <a:buNone/>
-            </a:pPr>
-            <a:r>
-              <a:rPr lang="en-US" sz="850" dirty="0">
+              <a:t>“Onde o processo mora — que sistemas, planilhas, ferramentas? Nuvem ou servidor de vocês?”</a:t>
+            </a:r>
+            <a:pPr indent="0" marL="0">
+              <a:lnSpc>
+                <a:spcPts val="1100"/>
+              </a:lnSpc>
+              <a:buNone/>
+            </a:pPr>
+            <a:r>
+              <a:rPr lang="en-US" sz="820" dirty="0">
                 <a:solidFill>
                   <a:srgbClr val="5A6472"/>
                 </a:solidFill>
@@ -2702,9 +2778,9 @@
                 <a:ea typeface="Calibri" pitchFamily="34" charset="-122"/>
                 <a:cs typeface="Calibri" pitchFamily="34" charset="-120"/>
               </a:rPr>
-              <a:t>  PEDIR PARA VER UM EXEMPLAR NA HORA</a:t>
-            </a:r>
-            <a:endParaRPr lang="en-US" sz="900" dirty="0"/>
+              <a:t>  nome e versão</a:t>
+            </a:r>
+            <a:endParaRPr lang="en-US" sz="880" dirty="0"/>
           </a:p>
         </p:txBody>
       </p:sp>
@@ -2716,27 +2792,27 @@
         </p:nvSpPr>
         <p:spPr>
           <a:xfrm>
-            <a:off x="1024128" y="1028700"/>
-            <a:ext cx="5971032" cy="256032"/>
-          </a:xfrm>
-          <a:prstGeom prst="rect">
-            <a:avLst/>
-          </a:prstGeom>
-          <a:noFill/>
-          <a:ln/>
-        </p:spPr>
-        <p:txBody>
-          <a:bodyPr wrap="square" lIns="0" tIns="0" rIns="0" bIns="0" rtlCol="0" anchor="ctr"/>
-          <a:lstStyle/>
-          <a:p>
-            <a:pPr indent="0" marL="0">
-              <a:lnSpc>
-                <a:spcPts val="1150"/>
-              </a:lnSpc>
-              <a:buNone/>
-            </a:pPr>
-            <a:r>
-              <a:rPr lang="en-US" sz="900" b="1" dirty="0">
+            <a:off x="950976" y="969264"/>
+            <a:ext cx="6080760" cy="256032"/>
+          </a:xfrm>
+          <a:prstGeom prst="rect">
+            <a:avLst/>
+          </a:prstGeom>
+          <a:noFill/>
+          <a:ln/>
+        </p:spPr>
+        <p:txBody>
+          <a:bodyPr wrap="square" lIns="0" tIns="0" rIns="0" bIns="0" rtlCol="0" anchor="ctr"/>
+          <a:lstStyle/>
+          <a:p>
+            <a:pPr indent="0" marL="0">
+              <a:lnSpc>
+                <a:spcPts val="1100"/>
+              </a:lnSpc>
+              <a:buNone/>
+            </a:pPr>
+            <a:r>
+              <a:rPr lang="en-US" sz="880" b="1" dirty="0">
                 <a:solidFill>
                   <a:srgbClr val="B8985A"/>
                 </a:solidFill>
@@ -2748,12 +2824,12 @@
             </a:r>
             <a:pPr indent="0" marL="0">
               <a:lnSpc>
-                <a:spcPts val="1150"/>
-              </a:lnSpc>
-              <a:buNone/>
-            </a:pPr>
-            <a:r>
-              <a:rPr lang="en-US" sz="900" i="1" dirty="0">
+                <a:spcPts val="1100"/>
+              </a:lnSpc>
+              <a:buNone/>
+            </a:pPr>
+            <a:r>
+              <a:rPr lang="en-US" sz="880" i="1" dirty="0">
                 <a:solidFill>
                   <a:srgbClr val="232B3A"/>
                 </a:solidFill>
@@ -2761,16 +2837,16 @@
                 <a:ea typeface="Calibri" pitchFamily="34" charset="-122"/>
                 <a:cs typeface="Calibri" pitchFamily="34" charset="-120"/>
               </a:rPr>
-              <a:t>“PDF escaneado ou digital? Planilha padronizada ou cada um de um jeito?”</a:t>
-            </a:r>
-            <a:pPr indent="0" marL="0">
-              <a:lnSpc>
-                <a:spcPts val="1150"/>
-              </a:lnSpc>
-              <a:buNone/>
-            </a:pPr>
-            <a:r>
-              <a:rPr lang="en-US" sz="850" dirty="0">
+              <a:t>“Como a informação entra e sai — digitação, relatório exportado, integração automática?”</a:t>
+            </a:r>
+            <a:pPr indent="0" marL="0">
+              <a:lnSpc>
+                <a:spcPts val="1100"/>
+              </a:lnSpc>
+              <a:buNone/>
+            </a:pPr>
+            <a:r>
+              <a:rPr lang="en-US" sz="820" dirty="0">
                 <a:solidFill>
                   <a:srgbClr val="5A6472"/>
                 </a:solidFill>
@@ -2778,9 +2854,9 @@
                 <a:ea typeface="Calibri" pitchFamily="34" charset="-122"/>
                 <a:cs typeface="Calibri" pitchFamily="34" charset="-120"/>
               </a:rPr>
-              <a:t>  muda o protótipo inteiro</a:t>
-            </a:r>
-            <a:endParaRPr lang="en-US" sz="900" dirty="0"/>
+              <a:t>  API = a ‘tomada’ que liga sistemas</a:t>
+            </a:r>
+            <a:endParaRPr lang="en-US" sz="880" dirty="0"/>
           </a:p>
         </p:txBody>
       </p:sp>
@@ -2792,27 +2868,27 @@
         </p:nvSpPr>
         <p:spPr>
           <a:xfrm>
-            <a:off x="1024128" y="1325880"/>
-            <a:ext cx="5971032" cy="237744"/>
-          </a:xfrm>
-          <a:prstGeom prst="rect">
-            <a:avLst/>
-          </a:prstGeom>
-          <a:noFill/>
-          <a:ln/>
-        </p:spPr>
-        <p:txBody>
-          <a:bodyPr wrap="square" lIns="0" tIns="0" rIns="0" bIns="0" rtlCol="0" anchor="ctr"/>
-          <a:lstStyle/>
-          <a:p>
-            <a:pPr indent="0" marL="0">
-              <a:lnSpc>
-                <a:spcPts val="1150"/>
-              </a:lnSpc>
-              <a:buNone/>
-            </a:pPr>
-            <a:r>
-              <a:rPr lang="en-US" sz="900" b="1" dirty="0">
+            <a:off x="950976" y="1261872"/>
+            <a:ext cx="6080760" cy="237744"/>
+          </a:xfrm>
+          <a:prstGeom prst="rect">
+            <a:avLst/>
+          </a:prstGeom>
+          <a:noFill/>
+          <a:ln/>
+        </p:spPr>
+        <p:txBody>
+          <a:bodyPr wrap="square" lIns="0" tIns="0" rIns="0" bIns="0" rtlCol="0" anchor="ctr"/>
+          <a:lstStyle/>
+          <a:p>
+            <a:pPr indent="0" marL="0">
+              <a:lnSpc>
+                <a:spcPts val="1100"/>
+              </a:lnSpc>
+              <a:buNone/>
+            </a:pPr>
+            <a:r>
+              <a:rPr lang="en-US" sz="880" b="1" dirty="0">
                 <a:solidFill>
                   <a:srgbClr val="B8985A"/>
                 </a:solidFill>
@@ -2824,12 +2900,12 @@
             </a:r>
             <a:pPr indent="0" marL="0">
               <a:lnSpc>
-                <a:spcPts val="1150"/>
-              </a:lnSpc>
-              <a:buNone/>
-            </a:pPr>
-            <a:r>
-              <a:rPr lang="en-US" sz="900" i="1" dirty="0">
+                <a:spcPts val="1100"/>
+              </a:lnSpc>
+              <a:buNone/>
+            </a:pPr>
+            <a:r>
+              <a:rPr lang="en-US" sz="880" i="1" dirty="0">
                 <a:solidFill>
                   <a:srgbClr val="232B3A"/>
                 </a:solidFill>
@@ -2837,9 +2913,26 @@
                 <a:ea typeface="Calibri" pitchFamily="34" charset="-122"/>
                 <a:cs typeface="Calibri" pitchFamily="34" charset="-120"/>
               </a:rPr>
-              <a:t>“Quantos por mês? Guardado desde quando? Onde?”</a:t>
-            </a:r>
-            <a:endParaRPr lang="en-US" sz="900" dirty="0"/>
+              <a:t>“O resultado precisa chegar ONDE, em que formato, para quem?”</a:t>
+            </a:r>
+            <a:pPr indent="0" marL="0">
+              <a:lnSpc>
+                <a:spcPts val="1100"/>
+              </a:lnSpc>
+              <a:buNone/>
+            </a:pPr>
+            <a:r>
+              <a:rPr lang="en-US" sz="820" dirty="0">
+                <a:solidFill>
+                  <a:srgbClr val="5A6472"/>
+                </a:solidFill>
+                <a:latin typeface="Calibri" pitchFamily="34" charset="0"/>
+                <a:ea typeface="Calibri" pitchFamily="34" charset="-122"/>
+                <a:cs typeface="Calibri" pitchFamily="34" charset="-120"/>
+              </a:rPr>
+              <a:t>  o destino define a última etapa do fluxo</a:t>
+            </a:r>
+            <a:endParaRPr lang="en-US" sz="880" dirty="0"/>
           </a:p>
         </p:txBody>
       </p:sp>
@@ -2851,27 +2944,27 @@
         </p:nvSpPr>
         <p:spPr>
           <a:xfrm>
-            <a:off x="1024128" y="1604772"/>
-            <a:ext cx="5971032" cy="237744"/>
-          </a:xfrm>
-          <a:prstGeom prst="rect">
-            <a:avLst/>
-          </a:prstGeom>
-          <a:noFill/>
-          <a:ln/>
-        </p:spPr>
-        <p:txBody>
-          <a:bodyPr wrap="square" lIns="0" tIns="0" rIns="0" bIns="0" rtlCol="0" anchor="ctr"/>
-          <a:lstStyle/>
-          <a:p>
-            <a:pPr indent="0" marL="0">
-              <a:lnSpc>
-                <a:spcPts val="1150"/>
-              </a:lnSpc>
-              <a:buNone/>
-            </a:pPr>
-            <a:r>
-              <a:rPr lang="en-US" sz="900" b="1" dirty="0">
+            <a:off x="950976" y="1536192"/>
+            <a:ext cx="6080760" cy="256032"/>
+          </a:xfrm>
+          <a:prstGeom prst="rect">
+            <a:avLst/>
+          </a:prstGeom>
+          <a:noFill/>
+          <a:ln/>
+        </p:spPr>
+        <p:txBody>
+          <a:bodyPr wrap="square" lIns="0" tIns="0" rIns="0" bIns="0" rtlCol="0" anchor="ctr"/>
+          <a:lstStyle/>
+          <a:p>
+            <a:pPr indent="0" marL="0">
+              <a:lnSpc>
+                <a:spcPts val="1100"/>
+              </a:lnSpc>
+              <a:buNone/>
+            </a:pPr>
+            <a:r>
+              <a:rPr lang="en-US" sz="880" b="1" dirty="0">
                 <a:solidFill>
                   <a:srgbClr val="B8985A"/>
                 </a:solidFill>
@@ -2883,12 +2976,12 @@
             </a:r>
             <a:pPr indent="0" marL="0">
               <a:lnSpc>
-                <a:spcPts val="1150"/>
-              </a:lnSpc>
-              <a:buNone/>
-            </a:pPr>
-            <a:r>
-              <a:rPr lang="en-US" sz="900" i="1" dirty="0">
+                <a:spcPts val="1100"/>
+              </a:lnSpc>
+              <a:buNone/>
+            </a:pPr>
+            <a:r>
+              <a:rPr lang="en-US" sz="880" i="1" dirty="0">
                 <a:solidFill>
                   <a:srgbClr val="232B3A"/>
                 </a:solidFill>
@@ -2896,16 +2989,16 @@
                 <a:ea typeface="Calibri" pitchFamily="34" charset="-122"/>
                 <a:cs typeface="Calibri" pitchFamily="34" charset="-120"/>
               </a:rPr>
-              <a:t>“Tem dado pessoal — nome, CPF, salário, saúde?”</a:t>
-            </a:r>
-            <a:pPr indent="0" marL="0">
-              <a:lnSpc>
-                <a:spcPts val="1150"/>
-              </a:lnSpc>
-              <a:buNone/>
-            </a:pPr>
-            <a:r>
-              <a:rPr lang="en-US" sz="850" dirty="0">
+              <a:t>“Para a prova, exportação manual serve — alguém extrai e nos manda?”</a:t>
+            </a:r>
+            <a:pPr indent="0" marL="0">
+              <a:lnSpc>
+                <a:spcPts val="1100"/>
+              </a:lnSpc>
+              <a:buNone/>
+            </a:pPr>
+            <a:r>
+              <a:rPr lang="en-US" sz="820" dirty="0">
                 <a:solidFill>
                   <a:srgbClr val="5A6472"/>
                 </a:solidFill>
@@ -2913,9 +3006,9 @@
                 <a:ea typeface="Calibri" pitchFamily="34" charset="-122"/>
                 <a:cs typeface="Calibri" pitchFamily="34" charset="-120"/>
               </a:rPr>
-              <a:t>  LGPD → anonimização</a:t>
-            </a:r>
-            <a:endParaRPr lang="en-US" sz="900" dirty="0"/>
+              <a:t>  de-risk: tira a TI do caminho crítico; integração real é fase de construção</a:t>
+            </a:r>
+            <a:endParaRPr lang="en-US" sz="880" dirty="0"/>
           </a:p>
         </p:txBody>
       </p:sp>
@@ -2927,27 +3020,27 @@
         </p:nvSpPr>
         <p:spPr>
           <a:xfrm>
-            <a:off x="1024128" y="1883664"/>
-            <a:ext cx="5971032" cy="365760"/>
-          </a:xfrm>
-          <a:prstGeom prst="rect">
-            <a:avLst/>
-          </a:prstGeom>
-          <a:noFill/>
-          <a:ln/>
-        </p:spPr>
-        <p:txBody>
-          <a:bodyPr wrap="square" lIns="0" tIns="0" rIns="0" bIns="0" rtlCol="0" anchor="ctr"/>
-          <a:lstStyle/>
-          <a:p>
-            <a:pPr indent="0" marL="0">
-              <a:lnSpc>
-                <a:spcPts val="1150"/>
-              </a:lnSpc>
-              <a:buNone/>
-            </a:pPr>
-            <a:r>
-              <a:rPr lang="en-US" sz="900" b="1" dirty="0">
+            <a:off x="950976" y="1828800"/>
+            <a:ext cx="6080760" cy="219456"/>
+          </a:xfrm>
+          <a:prstGeom prst="rect">
+            <a:avLst/>
+          </a:prstGeom>
+          <a:noFill/>
+          <a:ln/>
+        </p:spPr>
+        <p:txBody>
+          <a:bodyPr wrap="square" lIns="0" tIns="0" rIns="0" bIns="0" rtlCol="0" anchor="ctr"/>
+          <a:lstStyle/>
+          <a:p>
+            <a:pPr indent="0" marL="0">
+              <a:lnSpc>
+                <a:spcPts val="1100"/>
+              </a:lnSpc>
+              <a:buNone/>
+            </a:pPr>
+            <a:r>
+              <a:rPr lang="en-US" sz="880" b="1" dirty="0">
                 <a:solidFill>
                   <a:srgbClr val="B8985A"/>
                 </a:solidFill>
@@ -2959,12 +3052,12 @@
             </a:r>
             <a:pPr indent="0" marL="0">
               <a:lnSpc>
-                <a:spcPts val="1150"/>
-              </a:lnSpc>
-              <a:buNone/>
-            </a:pPr>
-            <a:r>
-              <a:rPr lang="en-US" sz="900" i="1" dirty="0">
+                <a:spcPts val="1100"/>
+              </a:lnSpc>
+              <a:buNone/>
+            </a:pPr>
+            <a:r>
+              <a:rPr lang="en-US" sz="880" i="1" dirty="0">
                 <a:solidFill>
                   <a:srgbClr val="232B3A"/>
                 </a:solidFill>
@@ -2972,16 +3065,16 @@
                 <a:ea typeface="Calibri" pitchFamily="34" charset="-122"/>
                 <a:cs typeface="Calibri" pitchFamily="34" charset="-120"/>
               </a:rPr>
-              <a:t>“Precisamos de 20–50 exemplos reais com a resposta certa de cada um — um gabarito. Quem monta, e até quando?”</a:t>
-            </a:r>
-            <a:pPr indent="0" marL="0">
-              <a:lnSpc>
-                <a:spcPts val="1150"/>
-              </a:lnSpc>
-              <a:buNone/>
-            </a:pPr>
-            <a:r>
-              <a:rPr lang="en-US" sz="850" dirty="0">
+              <a:t>“Quem administra — TI interna, fornecedor, terceirizada?”</a:t>
+            </a:r>
+            <a:pPr indent="0" marL="0">
+              <a:lnSpc>
+                <a:spcPts val="1100"/>
+              </a:lnSpc>
+              <a:buNone/>
+            </a:pPr>
+            <a:r>
+              <a:rPr lang="en-US" sz="820" dirty="0">
                 <a:solidFill>
                   <a:srgbClr val="5A6472"/>
                 </a:solidFill>
@@ -2989,9 +3082,9 @@
                 <a:ea typeface="Calibri" pitchFamily="34" charset="-122"/>
                 <a:cs typeface="Calibri" pitchFamily="34" charset="-120"/>
               </a:rPr>
-              <a:t>  o pedido que fecha o bloco</a:t>
-            </a:r>
-            <a:endParaRPr lang="en-US" sz="900" dirty="0"/>
+              <a:t>  de quem virá o acesso</a:t>
+            </a:r>
+            <a:endParaRPr lang="en-US" sz="880" dirty="0"/>
           </a:p>
         </p:txBody>
       </p:sp>
@@ -3003,8 +3096,8 @@
         </p:nvSpPr>
         <p:spPr>
           <a:xfrm>
-            <a:off x="1024128" y="2327148"/>
-            <a:ext cx="5971032" cy="0"/>
+            <a:off x="950976" y="2112264"/>
+            <a:ext cx="6080760" cy="0"/>
           </a:xfrm>
           <a:prstGeom prst="line">
             <a:avLst/>
@@ -3026,7 +3119,7 @@
         </p:nvSpPr>
         <p:spPr>
           <a:xfrm>
-            <a:off x="521208" y="2391156"/>
+            <a:off x="484632" y="2167128"/>
             <a:ext cx="457200" cy="457200"/>
           </a:xfrm>
           <a:prstGeom prst="rect">
@@ -3043,7 +3136,7 @@
               <a:buNone/>
             </a:pPr>
             <a:r>
-              <a:rPr lang="en-US" sz="2100" b="1" dirty="0">
+              <a:rPr lang="en-US" sz="2000" b="1" dirty="0">
                 <a:solidFill>
                   <a:srgbClr val="B8985A"/>
                 </a:solidFill>
@@ -3053,7 +3146,7 @@
               </a:rPr>
               <a:t>5</a:t>
             </a:r>
-            <a:endParaRPr lang="en-US" sz="2100" dirty="0"/>
+            <a:endParaRPr lang="en-US" sz="2000" dirty="0"/>
           </a:p>
         </p:txBody>
       </p:sp>
@@ -3065,24 +3158,24 @@
         </p:nvSpPr>
         <p:spPr>
           <a:xfrm>
-            <a:off x="1024128" y="2446020"/>
-            <a:ext cx="5971032" cy="237744"/>
-          </a:xfrm>
-          <a:prstGeom prst="rect">
-            <a:avLst/>
-          </a:prstGeom>
-          <a:noFill/>
-          <a:ln/>
-        </p:spPr>
-        <p:txBody>
-          <a:bodyPr wrap="square" lIns="0" tIns="0" rIns="0" bIns="0" rtlCol="0" anchor="ctr"/>
-          <a:lstStyle/>
-          <a:p>
-            <a:pPr indent="0" marL="0">
-              <a:buNone/>
-            </a:pPr>
-            <a:r>
-              <a:rPr lang="en-US" sz="1250" b="1" dirty="0">
+            <a:off x="950976" y="2221992"/>
+            <a:ext cx="6080760" cy="228600"/>
+          </a:xfrm>
+          <a:prstGeom prst="rect">
+            <a:avLst/>
+          </a:prstGeom>
+          <a:noFill/>
+          <a:ln/>
+        </p:spPr>
+        <p:txBody>
+          <a:bodyPr wrap="square" lIns="0" tIns="0" rIns="0" bIns="0" rtlCol="0" anchor="ctr"/>
+          <a:lstStyle/>
+          <a:p>
+            <a:pPr indent="0" marL="0">
+              <a:buNone/>
+            </a:pPr>
+            <a:r>
+              <a:rPr lang="en-US" sz="1200" b="1" dirty="0">
                 <a:solidFill>
                   <a:srgbClr val="1B2A4A"/>
                 </a:solidFill>
@@ -3090,13 +3183,13 @@
                 <a:ea typeface="Cambria" pitchFamily="34" charset="-122"/>
                 <a:cs typeface="Cambria" pitchFamily="34" charset="-120"/>
               </a:rPr>
-              <a:t>As pessoas</a:t>
-            </a:r>
-            <a:pPr indent="0" marL="0">
-              <a:buNone/>
-            </a:pPr>
-            <a:r>
-              <a:rPr lang="en-US" sz="850" dirty="0">
+              <a:t>Os dados e a amostra</a:t>
+            </a:r>
+            <a:pPr indent="0" marL="0">
+              <a:buNone/>
+            </a:pPr>
+            <a:r>
+              <a:rPr lang="en-US" sz="800" dirty="0">
                 <a:solidFill>
                   <a:srgbClr val="5A6472"/>
                 </a:solidFill>
@@ -3104,9 +3197,9 @@
                 <a:ea typeface="Calibri" pitchFamily="34" charset="-122"/>
                 <a:cs typeface="Calibri" pitchFamily="34" charset="-120"/>
               </a:rPr>
-              <a:t>   · 5 min</a:t>
-            </a:r>
-            <a:endParaRPr lang="en-US" sz="1250" dirty="0"/>
+              <a:t>   · 10 min</a:t>
+            </a:r>
+            <a:endParaRPr lang="en-US" sz="1200" dirty="0"/>
           </a:p>
         </p:txBody>
       </p:sp>
@@ -3118,27 +3211,27 @@
         </p:nvSpPr>
         <p:spPr>
           <a:xfrm>
-            <a:off x="1024128" y="2720340"/>
-            <a:ext cx="5971032" cy="256032"/>
-          </a:xfrm>
-          <a:prstGeom prst="rect">
-            <a:avLst/>
-          </a:prstGeom>
-          <a:noFill/>
-          <a:ln/>
-        </p:spPr>
-        <p:txBody>
-          <a:bodyPr wrap="square" lIns="0" tIns="0" rIns="0" bIns="0" rtlCol="0" anchor="ctr"/>
-          <a:lstStyle/>
-          <a:p>
-            <a:pPr indent="0" marL="0">
-              <a:lnSpc>
-                <a:spcPts val="1150"/>
-              </a:lnSpc>
-              <a:buNone/>
-            </a:pPr>
-            <a:r>
-              <a:rPr lang="en-US" sz="900" b="1" dirty="0">
+            <a:off x="950976" y="2487168"/>
+            <a:ext cx="6080760" cy="237744"/>
+          </a:xfrm>
+          <a:prstGeom prst="rect">
+            <a:avLst/>
+          </a:prstGeom>
+          <a:noFill/>
+          <a:ln/>
+        </p:spPr>
+        <p:txBody>
+          <a:bodyPr wrap="square" lIns="0" tIns="0" rIns="0" bIns="0" rtlCol="0" anchor="ctr"/>
+          <a:lstStyle/>
+          <a:p>
+            <a:pPr indent="0" marL="0">
+              <a:lnSpc>
+                <a:spcPts val="1100"/>
+              </a:lnSpc>
+              <a:buNone/>
+            </a:pPr>
+            <a:r>
+              <a:rPr lang="en-US" sz="880" b="1" dirty="0">
                 <a:solidFill>
                   <a:srgbClr val="B8985A"/>
                 </a:solidFill>
@@ -3150,12 +3243,12 @@
             </a:r>
             <a:pPr indent="0" marL="0">
               <a:lnSpc>
-                <a:spcPts val="1150"/>
-              </a:lnSpc>
-              <a:buNone/>
-            </a:pPr>
-            <a:r>
-              <a:rPr lang="en-US" sz="900" i="1" dirty="0">
+                <a:spcPts val="1100"/>
+              </a:lnSpc>
+              <a:buNone/>
+            </a:pPr>
+            <a:r>
+              <a:rPr lang="en-US" sz="880" i="1" dirty="0">
                 <a:solidFill>
                   <a:srgbClr val="232B3A"/>
                 </a:solidFill>
@@ -3163,16 +3256,16 @@
                 <a:ea typeface="Calibri" pitchFamily="34" charset="-122"/>
                 <a:cs typeface="Calibri" pitchFamily="34" charset="-120"/>
               </a:rPr>
-              <a:t>“Quem faz esse trabalho hoje? Quem conhece as exceções de cor?”</a:t>
-            </a:r>
-            <a:pPr indent="0" marL="0">
-              <a:lnSpc>
-                <a:spcPts val="1150"/>
-              </a:lnSpc>
-              <a:buNone/>
-            </a:pPr>
-            <a:r>
-              <a:rPr lang="en-US" sz="850" dirty="0">
+              <a:t>“Que documentos e dados o processo usa e produz?”</a:t>
+            </a:r>
+            <a:pPr indent="0" marL="0">
+              <a:lnSpc>
+                <a:spcPts val="1100"/>
+              </a:lnSpc>
+              <a:buNone/>
+            </a:pPr>
+            <a:r>
+              <a:rPr lang="en-US" sz="820" dirty="0">
                 <a:solidFill>
                   <a:srgbClr val="5A6472"/>
                 </a:solidFill>
@@ -3180,9 +3273,9 @@
                 <a:ea typeface="Calibri" pitchFamily="34" charset="-122"/>
                 <a:cs typeface="Calibri" pitchFamily="34" charset="-120"/>
               </a:rPr>
-              <a:t>  essa 2ª pessoa participa do protótipo</a:t>
-            </a:r>
-            <a:endParaRPr lang="en-US" sz="900" dirty="0"/>
+              <a:t>  PEDIR PARA VER UM EXEMPLAR NA HORA</a:t>
+            </a:r>
+            <a:endParaRPr lang="en-US" sz="880" dirty="0"/>
           </a:p>
         </p:txBody>
       </p:sp>
@@ -3194,27 +3287,27 @@
         </p:nvSpPr>
         <p:spPr>
           <a:xfrm>
-            <a:off x="1024128" y="3017520"/>
-            <a:ext cx="5971032" cy="237744"/>
-          </a:xfrm>
-          <a:prstGeom prst="rect">
-            <a:avLst/>
-          </a:prstGeom>
-          <a:noFill/>
-          <a:ln/>
-        </p:spPr>
-        <p:txBody>
-          <a:bodyPr wrap="square" lIns="0" tIns="0" rIns="0" bIns="0" rtlCol="0" anchor="ctr"/>
-          <a:lstStyle/>
-          <a:p>
-            <a:pPr indent="0" marL="0">
-              <a:lnSpc>
-                <a:spcPts val="1150"/>
-              </a:lnSpc>
-              <a:buNone/>
-            </a:pPr>
-            <a:r>
-              <a:rPr lang="en-US" sz="900" b="1" dirty="0">
+            <a:off x="950976" y="2761488"/>
+            <a:ext cx="6080760" cy="256032"/>
+          </a:xfrm>
+          <a:prstGeom prst="rect">
+            <a:avLst/>
+          </a:prstGeom>
+          <a:noFill/>
+          <a:ln/>
+        </p:spPr>
+        <p:txBody>
+          <a:bodyPr wrap="square" lIns="0" tIns="0" rIns="0" bIns="0" rtlCol="0" anchor="ctr"/>
+          <a:lstStyle/>
+          <a:p>
+            <a:pPr indent="0" marL="0">
+              <a:lnSpc>
+                <a:spcPts val="1100"/>
+              </a:lnSpc>
+              <a:buNone/>
+            </a:pPr>
+            <a:r>
+              <a:rPr lang="en-US" sz="880" b="1" dirty="0">
                 <a:solidFill>
                   <a:srgbClr val="B8985A"/>
                 </a:solidFill>
@@ -3226,12 +3319,12 @@
             </a:r>
             <a:pPr indent="0" marL="0">
               <a:lnSpc>
-                <a:spcPts val="1150"/>
-              </a:lnSpc>
-              <a:buNone/>
-            </a:pPr>
-            <a:r>
-              <a:rPr lang="en-US" sz="900" i="1" dirty="0">
+                <a:spcPts val="1100"/>
+              </a:lnSpc>
+              <a:buNone/>
+            </a:pPr>
+            <a:r>
+              <a:rPr lang="en-US" sz="880" i="1" dirty="0">
                 <a:solidFill>
                   <a:srgbClr val="232B3A"/>
                 </a:solidFill>
@@ -3239,16 +3332,16 @@
                 <a:ea typeface="Calibri" pitchFamily="34" charset="-122"/>
                 <a:cs typeface="Calibri" pitchFamily="34" charset="-120"/>
               </a:rPr>
-              <a:t>“Quem revisa e aprova o que a IA fizer?”</a:t>
-            </a:r>
-            <a:pPr indent="0" marL="0">
-              <a:lnSpc>
-                <a:spcPts val="1150"/>
-              </a:lnSpc>
-              <a:buNone/>
-            </a:pPr>
-            <a:r>
-              <a:rPr lang="en-US" sz="850" dirty="0">
+              <a:t>“PDF escaneado ou digital? Foto? Áudio? Planilha padronizada ou cada um de um jeito?”</a:t>
+            </a:r>
+            <a:pPr indent="0" marL="0">
+              <a:lnSpc>
+                <a:spcPts val="1100"/>
+              </a:lnSpc>
+              <a:buNone/>
+            </a:pPr>
+            <a:r>
+              <a:rPr lang="en-US" sz="820" dirty="0">
                 <a:solidFill>
                   <a:srgbClr val="5A6472"/>
                 </a:solidFill>
@@ -3256,9 +3349,9 @@
                 <a:ea typeface="Calibri" pitchFamily="34" charset="-122"/>
                 <a:cs typeface="Calibri" pitchFamily="34" charset="-120"/>
               </a:rPr>
-              <a:t>  a IA executa, gente da confiança de vocês valida</a:t>
-            </a:r>
-            <a:endParaRPr lang="en-US" sz="900" dirty="0"/>
+              <a:t>  muda o protótipo inteiro</a:t>
+            </a:r>
+            <a:endParaRPr lang="en-US" sz="880" dirty="0"/>
           </a:p>
         </p:txBody>
       </p:sp>
@@ -3270,27 +3363,27 @@
         </p:nvSpPr>
         <p:spPr>
           <a:xfrm>
-            <a:off x="1024128" y="3296412"/>
-            <a:ext cx="5971032" cy="237744"/>
-          </a:xfrm>
-          <a:prstGeom prst="rect">
-            <a:avLst/>
-          </a:prstGeom>
-          <a:noFill/>
-          <a:ln/>
-        </p:spPr>
-        <p:txBody>
-          <a:bodyPr wrap="square" lIns="0" tIns="0" rIns="0" bIns="0" rtlCol="0" anchor="ctr"/>
-          <a:lstStyle/>
-          <a:p>
-            <a:pPr indent="0" marL="0">
-              <a:lnSpc>
-                <a:spcPts val="1150"/>
-              </a:lnSpc>
-              <a:buNone/>
-            </a:pPr>
-            <a:r>
-              <a:rPr lang="en-US" sz="900" b="1" dirty="0">
+            <a:off x="950976" y="3054096"/>
+            <a:ext cx="6080760" cy="256032"/>
+          </a:xfrm>
+          <a:prstGeom prst="rect">
+            <a:avLst/>
+          </a:prstGeom>
+          <a:noFill/>
+          <a:ln/>
+        </p:spPr>
+        <p:txBody>
+          <a:bodyPr wrap="square" lIns="0" tIns="0" rIns="0" bIns="0" rtlCol="0" anchor="ctr"/>
+          <a:lstStyle/>
+          <a:p>
+            <a:pPr indent="0" marL="0">
+              <a:lnSpc>
+                <a:spcPts val="1100"/>
+              </a:lnSpc>
+              <a:buNone/>
+            </a:pPr>
+            <a:r>
+              <a:rPr lang="en-US" sz="880" b="1" dirty="0">
                 <a:solidFill>
                   <a:srgbClr val="B8985A"/>
                 </a:solidFill>
@@ -3302,12 +3395,12 @@
             </a:r>
             <a:pPr indent="0" marL="0">
               <a:lnSpc>
-                <a:spcPts val="1150"/>
-              </a:lnSpc>
-              <a:buNone/>
-            </a:pPr>
-            <a:r>
-              <a:rPr lang="en-US" sz="900" i="1" dirty="0">
+                <a:spcPts val="1100"/>
+              </a:lnSpc>
+              <a:buNone/>
+            </a:pPr>
+            <a:r>
+              <a:rPr lang="en-US" sz="880" i="1" dirty="0">
                 <a:solidFill>
                   <a:srgbClr val="232B3A"/>
                 </a:solidFill>
@@ -3315,16 +3408,16 @@
                 <a:ea typeface="Calibri" pitchFamily="34" charset="-122"/>
                 <a:cs typeface="Calibri" pitchFamily="34" charset="-120"/>
               </a:rPr>
-              <a:t>“Quem é o nosso ponto focal técnico?”</a:t>
-            </a:r>
-            <a:pPr indent="0" marL="0">
-              <a:lnSpc>
-                <a:spcPts val="1150"/>
-              </a:lnSpc>
-              <a:buNone/>
-            </a:pPr>
-            <a:r>
-              <a:rPr lang="en-US" sz="850" dirty="0">
+              <a:t>“Quantos por mês? Guardado desde quando? Onde?  ·  Tem dado pessoal — nome, CPF, salário?”</a:t>
+            </a:r>
+            <a:pPr indent="0" marL="0">
+              <a:lnSpc>
+                <a:spcPts val="1100"/>
+              </a:lnSpc>
+              <a:buNone/>
+            </a:pPr>
+            <a:r>
+              <a:rPr lang="en-US" sz="820" dirty="0">
                 <a:solidFill>
                   <a:srgbClr val="5A6472"/>
                 </a:solidFill>
@@ -3332,22 +3425,174 @@
                 <a:ea typeface="Calibri" pitchFamily="34" charset="-122"/>
                 <a:cs typeface="Calibri" pitchFamily="34" charset="-120"/>
               </a:rPr>
-              <a:t>  nome + canal</a:t>
-            </a:r>
-            <a:endParaRPr lang="en-US" sz="900" dirty="0"/>
-          </a:p>
-        </p:txBody>
-      </p:sp>
-      <p:sp>
-        <p:nvSpPr>
-          <p:cNvPr id="15" name="Shape 13"/>
-          <p:cNvSpPr/>
-          <p:nvPr/>
-        </p:nvSpPr>
-        <p:spPr>
-          <a:xfrm>
-            <a:off x="1024128" y="3611880"/>
-            <a:ext cx="5971032" cy="0"/>
+              <a:t>  LGPD → anonimização</a:t>
+            </a:r>
+            <a:endParaRPr lang="en-US" sz="880" dirty="0"/>
+          </a:p>
+        </p:txBody>
+      </p:sp>
+      <p:sp>
+        <p:nvSpPr>
+          <p:cNvPr id="15" name="Text 13"/>
+          <p:cNvSpPr/>
+          <p:nvPr/>
+        </p:nvSpPr>
+        <p:spPr>
+          <a:xfrm>
+            <a:off x="950976" y="3346704"/>
+            <a:ext cx="6080760" cy="237744"/>
+          </a:xfrm>
+          <a:prstGeom prst="rect">
+            <a:avLst/>
+          </a:prstGeom>
+          <a:noFill/>
+          <a:ln/>
+        </p:spPr>
+        <p:txBody>
+          <a:bodyPr wrap="square" lIns="0" tIns="0" rIns="0" bIns="0" rtlCol="0" anchor="ctr"/>
+          <a:lstStyle/>
+          <a:p>
+            <a:pPr indent="0" marL="0">
+              <a:lnSpc>
+                <a:spcPts val="1100"/>
+              </a:lnSpc>
+              <a:buNone/>
+            </a:pPr>
+            <a:r>
+              <a:rPr lang="en-US" sz="880" b="1" dirty="0">
+                <a:solidFill>
+                  <a:srgbClr val="B8985A"/>
+                </a:solidFill>
+                <a:latin typeface="Calibri" pitchFamily="34" charset="0"/>
+                <a:ea typeface="Calibri" pitchFamily="34" charset="-122"/>
+                <a:cs typeface="Calibri" pitchFamily="34" charset="-120"/>
+              </a:rPr>
+              <a:t>— </a:t>
+            </a:r>
+            <a:pPr indent="0" marL="0">
+              <a:lnSpc>
+                <a:spcPts val="1100"/>
+              </a:lnSpc>
+              <a:buNone/>
+            </a:pPr>
+            <a:r>
+              <a:rPr lang="en-US" sz="880" i="1" dirty="0">
+                <a:solidFill>
+                  <a:srgbClr val="232B3A"/>
+                </a:solidFill>
+                <a:latin typeface="Calibri" pitchFamily="34" charset="0"/>
+                <a:ea typeface="Calibri" pitchFamily="34" charset="-122"/>
+                <a:cs typeface="Calibri" pitchFamily="34" charset="-120"/>
+              </a:rPr>
+              <a:t>“A empresa permite IA em nuvem sobre esses dados, ou fica tudo dentro de casa?”</a:t>
+            </a:r>
+            <a:pPr indent="0" marL="0">
+              <a:lnSpc>
+                <a:spcPts val="1100"/>
+              </a:lnSpc>
+              <a:buNone/>
+            </a:pPr>
+            <a:r>
+              <a:rPr lang="en-US" sz="820" dirty="0">
+                <a:solidFill>
+                  <a:srgbClr val="5A6472"/>
+                </a:solidFill>
+                <a:latin typeface="Calibri" pitchFamily="34" charset="0"/>
+                <a:ea typeface="Calibri" pitchFamily="34" charset="-122"/>
+                <a:cs typeface="Calibri" pitchFamily="34" charset="-120"/>
+              </a:rPr>
+              <a:t>  temos as duas vias</a:t>
+            </a:r>
+            <a:endParaRPr lang="en-US" sz="880" dirty="0"/>
+          </a:p>
+        </p:txBody>
+      </p:sp>
+      <p:sp>
+        <p:nvSpPr>
+          <p:cNvPr id="16" name="Text 14"/>
+          <p:cNvSpPr/>
+          <p:nvPr/>
+        </p:nvSpPr>
+        <p:spPr>
+          <a:xfrm>
+            <a:off x="950976" y="3621024"/>
+            <a:ext cx="6080760" cy="365760"/>
+          </a:xfrm>
+          <a:prstGeom prst="rect">
+            <a:avLst/>
+          </a:prstGeom>
+          <a:noFill/>
+          <a:ln/>
+        </p:spPr>
+        <p:txBody>
+          <a:bodyPr wrap="square" lIns="0" tIns="0" rIns="0" bIns="0" rtlCol="0" anchor="ctr"/>
+          <a:lstStyle/>
+          <a:p>
+            <a:pPr indent="0" marL="0">
+              <a:lnSpc>
+                <a:spcPts val="1100"/>
+              </a:lnSpc>
+              <a:buNone/>
+            </a:pPr>
+            <a:r>
+              <a:rPr lang="en-US" sz="880" b="1" dirty="0">
+                <a:solidFill>
+                  <a:srgbClr val="B8985A"/>
+                </a:solidFill>
+                <a:latin typeface="Calibri" pitchFamily="34" charset="0"/>
+                <a:ea typeface="Calibri" pitchFamily="34" charset="-122"/>
+                <a:cs typeface="Calibri" pitchFamily="34" charset="-120"/>
+              </a:rPr>
+              <a:t>— </a:t>
+            </a:r>
+            <a:pPr indent="0" marL="0">
+              <a:lnSpc>
+                <a:spcPts val="1100"/>
+              </a:lnSpc>
+              <a:buNone/>
+            </a:pPr>
+            <a:r>
+              <a:rPr lang="en-US" sz="880" i="1" dirty="0">
+                <a:solidFill>
+                  <a:srgbClr val="232B3A"/>
+                </a:solidFill>
+                <a:latin typeface="Calibri" pitchFamily="34" charset="0"/>
+                <a:ea typeface="Calibri" pitchFamily="34" charset="-122"/>
+                <a:cs typeface="Calibri" pitchFamily="34" charset="-120"/>
+              </a:rPr>
+              <a:t>“Precisamos de 20–50 exemplos reais com a resposta certa de cada um — um gabarito. Quem monta, e até quando?”</a:t>
+            </a:r>
+            <a:pPr indent="0" marL="0">
+              <a:lnSpc>
+                <a:spcPts val="1100"/>
+              </a:lnSpc>
+              <a:buNone/>
+            </a:pPr>
+            <a:r>
+              <a:rPr lang="en-US" sz="820" dirty="0">
+                <a:solidFill>
+                  <a:srgbClr val="5A6472"/>
+                </a:solidFill>
+                <a:latin typeface="Calibri" pitchFamily="34" charset="0"/>
+                <a:ea typeface="Calibri" pitchFamily="34" charset="-122"/>
+                <a:cs typeface="Calibri" pitchFamily="34" charset="-120"/>
+              </a:rPr>
+              <a:t>  a régua com que o protótipo será medido</a:t>
+            </a:r>
+            <a:endParaRPr lang="en-US" sz="880" dirty="0"/>
+          </a:p>
+        </p:txBody>
+      </p:sp>
+      <p:sp>
+        <p:nvSpPr>
+          <p:cNvPr id="17" name="Shape 15"/>
+          <p:cNvSpPr/>
+          <p:nvPr/>
+        </p:nvSpPr>
+        <p:spPr>
+          <a:xfrm>
+            <a:off x="950976" y="4050792"/>
+            <a:ext cx="6080760" cy="0"/>
           </a:xfrm>
           <a:prstGeom prst="line">
             <a:avLst/>
@@ -3363,13 +3608,13 @@
       </p:sp>
       <p:sp>
         <p:nvSpPr>
-          <p:cNvPr id="16" name="Text 14"/>
-          <p:cNvSpPr/>
-          <p:nvPr/>
-        </p:nvSpPr>
-        <p:spPr>
-          <a:xfrm>
-            <a:off x="521208" y="3675888"/>
+          <p:cNvPr id="18" name="Text 16"/>
+          <p:cNvSpPr/>
+          <p:nvPr/>
+        </p:nvSpPr>
+        <p:spPr>
+          <a:xfrm>
+            <a:off x="484632" y="4105656"/>
             <a:ext cx="457200" cy="457200"/>
           </a:xfrm>
           <a:prstGeom prst="rect">
@@ -3386,7 +3631,7 @@
               <a:buNone/>
             </a:pPr>
             <a:r>
-              <a:rPr lang="en-US" sz="2100" b="1" dirty="0">
+              <a:rPr lang="en-US" sz="2000" b="1" dirty="0">
                 <a:solidFill>
                   <a:srgbClr val="B8985A"/>
                 </a:solidFill>
@@ -3396,36 +3641,36 @@
               </a:rPr>
               <a:t>6</a:t>
             </a:r>
-            <a:endParaRPr lang="en-US" sz="2100" dirty="0"/>
-          </a:p>
-        </p:txBody>
-      </p:sp>
-      <p:sp>
-        <p:nvSpPr>
-          <p:cNvPr id="17" name="Text 15"/>
-          <p:cNvSpPr/>
-          <p:nvPr/>
-        </p:nvSpPr>
-        <p:spPr>
-          <a:xfrm>
-            <a:off x="1024128" y="3730752"/>
-            <a:ext cx="5971032" cy="237744"/>
-          </a:xfrm>
-          <a:prstGeom prst="rect">
-            <a:avLst/>
-          </a:prstGeom>
-          <a:noFill/>
-          <a:ln/>
-        </p:spPr>
-        <p:txBody>
-          <a:bodyPr wrap="square" lIns="0" tIns="0" rIns="0" bIns="0" rtlCol="0" anchor="ctr"/>
-          <a:lstStyle/>
-          <a:p>
-            <a:pPr indent="0" marL="0">
-              <a:buNone/>
-            </a:pPr>
-            <a:r>
-              <a:rPr lang="en-US" sz="1250" b="1" dirty="0">
+            <a:endParaRPr lang="en-US" sz="2000" dirty="0"/>
+          </a:p>
+        </p:txBody>
+      </p:sp>
+      <p:sp>
+        <p:nvSpPr>
+          <p:cNvPr id="19" name="Text 17"/>
+          <p:cNvSpPr/>
+          <p:nvPr/>
+        </p:nvSpPr>
+        <p:spPr>
+          <a:xfrm>
+            <a:off x="950976" y="4160520"/>
+            <a:ext cx="6080760" cy="228600"/>
+          </a:xfrm>
+          <a:prstGeom prst="rect">
+            <a:avLst/>
+          </a:prstGeom>
+          <a:noFill/>
+          <a:ln/>
+        </p:spPr>
+        <p:txBody>
+          <a:bodyPr wrap="square" lIns="0" tIns="0" rIns="0" bIns="0" rtlCol="0" anchor="ctr"/>
+          <a:lstStyle/>
+          <a:p>
+            <a:pPr indent="0" marL="0">
+              <a:buNone/>
+            </a:pPr>
+            <a:r>
+              <a:rPr lang="en-US" sz="1200" b="1" dirty="0">
                 <a:solidFill>
                   <a:srgbClr val="1B2A4A"/>
                 </a:solidFill>
@@ -3433,13 +3678,13 @@
                 <a:ea typeface="Cambria" pitchFamily="34" charset="-122"/>
                 <a:cs typeface="Cambria" pitchFamily="34" charset="-120"/>
               </a:rPr>
-              <a:t>Restrições e logística</a:t>
-            </a:r>
-            <a:pPr indent="0" marL="0">
-              <a:buNone/>
-            </a:pPr>
-            <a:r>
-              <a:rPr lang="en-US" sz="850" dirty="0">
+              <a:t>As pessoas</a:t>
+            </a:r>
+            <a:pPr indent="0" marL="0">
+              <a:buNone/>
+            </a:pPr>
+            <a:r>
+              <a:rPr lang="en-US" sz="800" dirty="0">
                 <a:solidFill>
                   <a:srgbClr val="5A6472"/>
                 </a:solidFill>
@@ -3449,39 +3694,39 @@
               </a:rPr>
               <a:t>   · 5 min</a:t>
             </a:r>
-            <a:endParaRPr lang="en-US" sz="1250" dirty="0"/>
-          </a:p>
-        </p:txBody>
-      </p:sp>
-      <p:sp>
-        <p:nvSpPr>
-          <p:cNvPr id="18" name="Text 16"/>
-          <p:cNvSpPr/>
-          <p:nvPr/>
-        </p:nvSpPr>
-        <p:spPr>
-          <a:xfrm>
-            <a:off x="1024128" y="4005072"/>
-            <a:ext cx="5971032" cy="237744"/>
-          </a:xfrm>
-          <a:prstGeom prst="rect">
-            <a:avLst/>
-          </a:prstGeom>
-          <a:noFill/>
-          <a:ln/>
-        </p:spPr>
-        <p:txBody>
-          <a:bodyPr wrap="square" lIns="0" tIns="0" rIns="0" bIns="0" rtlCol="0" anchor="ctr"/>
-          <a:lstStyle/>
-          <a:p>
-            <a:pPr indent="0" marL="0">
-              <a:lnSpc>
-                <a:spcPts val="1150"/>
-              </a:lnSpc>
-              <a:buNone/>
-            </a:pPr>
-            <a:r>
-              <a:rPr lang="en-US" sz="900" b="1" dirty="0">
+            <a:endParaRPr lang="en-US" sz="1200" dirty="0"/>
+          </a:p>
+        </p:txBody>
+      </p:sp>
+      <p:sp>
+        <p:nvSpPr>
+          <p:cNvPr id="20" name="Text 18"/>
+          <p:cNvSpPr/>
+          <p:nvPr/>
+        </p:nvSpPr>
+        <p:spPr>
+          <a:xfrm>
+            <a:off x="950976" y="4425696"/>
+            <a:ext cx="6080760" cy="237744"/>
+          </a:xfrm>
+          <a:prstGeom prst="rect">
+            <a:avLst/>
+          </a:prstGeom>
+          <a:noFill/>
+          <a:ln/>
+        </p:spPr>
+        <p:txBody>
+          <a:bodyPr wrap="square" lIns="0" tIns="0" rIns="0" bIns="0" rtlCol="0" anchor="ctr"/>
+          <a:lstStyle/>
+          <a:p>
+            <a:pPr indent="0" marL="0">
+              <a:lnSpc>
+                <a:spcPts val="1100"/>
+              </a:lnSpc>
+              <a:buNone/>
+            </a:pPr>
+            <a:r>
+              <a:rPr lang="en-US" sz="880" b="1" dirty="0">
                 <a:solidFill>
                   <a:srgbClr val="B8985A"/>
                 </a:solidFill>
@@ -3493,12 +3738,12 @@
             </a:r>
             <a:pPr indent="0" marL="0">
               <a:lnSpc>
-                <a:spcPts val="1150"/>
-              </a:lnSpc>
-              <a:buNone/>
-            </a:pPr>
-            <a:r>
-              <a:rPr lang="en-US" sz="900" i="1" dirty="0">
+                <a:spcPts val="1100"/>
+              </a:lnSpc>
+              <a:buNone/>
+            </a:pPr>
+            <a:r>
+              <a:rPr lang="en-US" sz="880" i="1" dirty="0">
                 <a:solidFill>
                   <a:srgbClr val="232B3A"/>
                 </a:solidFill>
@@ -3506,16 +3751,16 @@
                 <a:ea typeface="Calibri" pitchFamily="34" charset="-122"/>
                 <a:cs typeface="Calibri" pitchFamily="34" charset="-120"/>
               </a:rPr>
-              <a:t>“Os dados podem sair para a nossa nuvem, ou ficam aí dentro?”</a:t>
-            </a:r>
-            <a:pPr indent="0" marL="0">
-              <a:lnSpc>
-                <a:spcPts val="1150"/>
-              </a:lnSpc>
-              <a:buNone/>
-            </a:pPr>
-            <a:r>
-              <a:rPr lang="en-US" sz="850" dirty="0">
+              <a:t>“Quem faz hoje? Quem conhece as exceções de cor?”</a:t>
+            </a:r>
+            <a:pPr indent="0" marL="0">
+              <a:lnSpc>
+                <a:spcPts val="1100"/>
+              </a:lnSpc>
+              <a:buNone/>
+            </a:pPr>
+            <a:r>
+              <a:rPr lang="en-US" sz="820" dirty="0">
                 <a:solidFill>
                   <a:srgbClr val="5A6472"/>
                 </a:solidFill>
@@ -3523,41 +3768,41 @@
                 <a:ea typeface="Calibri" pitchFamily="34" charset="-122"/>
                 <a:cs typeface="Calibri" pitchFamily="34" charset="-120"/>
               </a:rPr>
-              <a:t>  temos as duas vias</a:t>
-            </a:r>
-            <a:endParaRPr lang="en-US" sz="900" dirty="0"/>
-          </a:p>
-        </p:txBody>
-      </p:sp>
-      <p:sp>
-        <p:nvSpPr>
-          <p:cNvPr id="19" name="Text 17"/>
-          <p:cNvSpPr/>
-          <p:nvPr/>
-        </p:nvSpPr>
-        <p:spPr>
-          <a:xfrm>
-            <a:off x="1024128" y="4283964"/>
-            <a:ext cx="5971032" cy="237744"/>
-          </a:xfrm>
-          <a:prstGeom prst="rect">
-            <a:avLst/>
-          </a:prstGeom>
-          <a:noFill/>
-          <a:ln/>
-        </p:spPr>
-        <p:txBody>
-          <a:bodyPr wrap="square" lIns="0" tIns="0" rIns="0" bIns="0" rtlCol="0" anchor="ctr"/>
-          <a:lstStyle/>
-          <a:p>
-            <a:pPr indent="0" marL="0">
-              <a:lnSpc>
-                <a:spcPts val="1150"/>
-              </a:lnSpc>
-              <a:buNone/>
-            </a:pPr>
-            <a:r>
-              <a:rPr lang="en-US" sz="900" b="1" dirty="0">
+              <a:t>  essa 2ª pessoa participa do protótipo</a:t>
+            </a:r>
+            <a:endParaRPr lang="en-US" sz="880" dirty="0"/>
+          </a:p>
+        </p:txBody>
+      </p:sp>
+      <p:sp>
+        <p:nvSpPr>
+          <p:cNvPr id="21" name="Text 19"/>
+          <p:cNvSpPr/>
+          <p:nvPr/>
+        </p:nvSpPr>
+        <p:spPr>
+          <a:xfrm>
+            <a:off x="950976" y="4700016"/>
+            <a:ext cx="6080760" cy="237744"/>
+          </a:xfrm>
+          <a:prstGeom prst="rect">
+            <a:avLst/>
+          </a:prstGeom>
+          <a:noFill/>
+          <a:ln/>
+        </p:spPr>
+        <p:txBody>
+          <a:bodyPr wrap="square" lIns="0" tIns="0" rIns="0" bIns="0" rtlCol="0" anchor="ctr"/>
+          <a:lstStyle/>
+          <a:p>
+            <a:pPr indent="0" marL="0">
+              <a:lnSpc>
+                <a:spcPts val="1100"/>
+              </a:lnSpc>
+              <a:buNone/>
+            </a:pPr>
+            <a:r>
+              <a:rPr lang="en-US" sz="880" b="1" dirty="0">
                 <a:solidFill>
                   <a:srgbClr val="B8985A"/>
                 </a:solidFill>
@@ -3569,12 +3814,12 @@
             </a:r>
             <a:pPr indent="0" marL="0">
               <a:lnSpc>
-                <a:spcPts val="1150"/>
-              </a:lnSpc>
-              <a:buNone/>
-            </a:pPr>
-            <a:r>
-              <a:rPr lang="en-US" sz="900" i="1" dirty="0">
+                <a:spcPts val="1100"/>
+              </a:lnSpc>
+              <a:buNone/>
+            </a:pPr>
+            <a:r>
+              <a:rPr lang="en-US" sz="880" i="1" dirty="0">
                 <a:solidFill>
                   <a:srgbClr val="232B3A"/>
                 </a:solidFill>
@@ -3582,41 +3827,58 @@
                 <a:ea typeface="Calibri" pitchFamily="34" charset="-122"/>
                 <a:cs typeface="Calibri" pitchFamily="34" charset="-120"/>
               </a:rPr>
-              <a:t>“Precisa de NDA antes da amostra? Quem autoriza acessos?”</a:t>
-            </a:r>
-            <a:endParaRPr lang="en-US" sz="900" dirty="0"/>
-          </a:p>
-        </p:txBody>
-      </p:sp>
-      <p:sp>
-        <p:nvSpPr>
-          <p:cNvPr id="20" name="Text 18"/>
-          <p:cNvSpPr/>
-          <p:nvPr/>
-        </p:nvSpPr>
-        <p:spPr>
-          <a:xfrm>
-            <a:off x="1024128" y="4562856"/>
-            <a:ext cx="5971032" cy="237744"/>
-          </a:xfrm>
-          <a:prstGeom prst="rect">
-            <a:avLst/>
-          </a:prstGeom>
-          <a:noFill/>
-          <a:ln/>
-        </p:spPr>
-        <p:txBody>
-          <a:bodyPr wrap="square" lIns="0" tIns="0" rIns="0" bIns="0" rtlCol="0" anchor="ctr"/>
-          <a:lstStyle/>
-          <a:p>
-            <a:pPr indent="0" marL="0">
-              <a:lnSpc>
-                <a:spcPts val="1150"/>
-              </a:lnSpc>
-              <a:buNone/>
-            </a:pPr>
-            <a:r>
-              <a:rPr lang="en-US" sz="900" b="1" dirty="0">
+              <a:t>“Quantas horas por semana essa pessoa nos dá durante o protótipo?”</a:t>
+            </a:r>
+            <a:pPr indent="0" marL="0">
+              <a:lnSpc>
+                <a:spcPts val="1100"/>
+              </a:lnSpc>
+              <a:buNone/>
+            </a:pPr>
+            <a:r>
+              <a:rPr lang="en-US" sz="820" dirty="0">
+                <a:solidFill>
+                  <a:srgbClr val="5A6472"/>
+                </a:solidFill>
+                <a:latin typeface="Calibri" pitchFamily="34" charset="0"/>
+                <a:ea typeface="Calibri" pitchFamily="34" charset="-122"/>
+                <a:cs typeface="Calibri" pitchFamily="34" charset="-120"/>
+              </a:rPr>
+              <a:t>  o gargalo real — perguntar SEMPRE</a:t>
+            </a:r>
+            <a:endParaRPr lang="en-US" sz="880" dirty="0"/>
+          </a:p>
+        </p:txBody>
+      </p:sp>
+      <p:sp>
+        <p:nvSpPr>
+          <p:cNvPr id="22" name="Text 20"/>
+          <p:cNvSpPr/>
+          <p:nvPr/>
+        </p:nvSpPr>
+        <p:spPr>
+          <a:xfrm>
+            <a:off x="950976" y="4974336"/>
+            <a:ext cx="6080760" cy="237744"/>
+          </a:xfrm>
+          <a:prstGeom prst="rect">
+            <a:avLst/>
+          </a:prstGeom>
+          <a:noFill/>
+          <a:ln/>
+        </p:spPr>
+        <p:txBody>
+          <a:bodyPr wrap="square" lIns="0" tIns="0" rIns="0" bIns="0" rtlCol="0" anchor="ctr"/>
+          <a:lstStyle/>
+          <a:p>
+            <a:pPr indent="0" marL="0">
+              <a:lnSpc>
+                <a:spcPts val="1100"/>
+              </a:lnSpc>
+              <a:buNone/>
+            </a:pPr>
+            <a:r>
+              <a:rPr lang="en-US" sz="880" b="1" dirty="0">
                 <a:solidFill>
                   <a:srgbClr val="B8985A"/>
                 </a:solidFill>
@@ -3628,12 +3890,12 @@
             </a:r>
             <a:pPr indent="0" marL="0">
               <a:lnSpc>
-                <a:spcPts val="1150"/>
-              </a:lnSpc>
-              <a:buNone/>
-            </a:pPr>
-            <a:r>
-              <a:rPr lang="en-US" sz="900" i="1" dirty="0">
+                <a:spcPts val="1100"/>
+              </a:lnSpc>
+              <a:buNone/>
+            </a:pPr>
+            <a:r>
+              <a:rPr lang="en-US" sz="880" i="1" dirty="0">
                 <a:solidFill>
                   <a:srgbClr val="232B3A"/>
                 </a:solidFill>
@@ -3641,41 +3903,58 @@
                 <a:ea typeface="Calibri" pitchFamily="34" charset="-122"/>
                 <a:cs typeface="Calibri" pitchFamily="34" charset="-120"/>
               </a:rPr>
-              <a:t>“Se bater a meta, quem decide o passo seguinte — e em que fórum?”</a:t>
-            </a:r>
-            <a:endParaRPr lang="en-US" sz="900" dirty="0"/>
-          </a:p>
-        </p:txBody>
-      </p:sp>
-      <p:sp>
-        <p:nvSpPr>
-          <p:cNvPr id="21" name="Text 19"/>
-          <p:cNvSpPr/>
-          <p:nvPr/>
-        </p:nvSpPr>
-        <p:spPr>
-          <a:xfrm>
-            <a:off x="1024128" y="4841748"/>
-            <a:ext cx="5971032" cy="256032"/>
-          </a:xfrm>
-          <a:prstGeom prst="rect">
-            <a:avLst/>
-          </a:prstGeom>
-          <a:noFill/>
-          <a:ln/>
-        </p:spPr>
-        <p:txBody>
-          <a:bodyPr wrap="square" lIns="0" tIns="0" rIns="0" bIns="0" rtlCol="0" anchor="ctr"/>
-          <a:lstStyle/>
-          <a:p>
-            <a:pPr indent="0" marL="0">
-              <a:lnSpc>
-                <a:spcPts val="1150"/>
-              </a:lnSpc>
-              <a:buNone/>
-            </a:pPr>
-            <a:r>
-              <a:rPr lang="en-US" sz="900" b="1" dirty="0">
+              <a:t>“Quem revisa e aprova o que a IA fizer?”</a:t>
+            </a:r>
+            <a:pPr indent="0" marL="0">
+              <a:lnSpc>
+                <a:spcPts val="1100"/>
+              </a:lnSpc>
+              <a:buNone/>
+            </a:pPr>
+            <a:r>
+              <a:rPr lang="en-US" sz="820" dirty="0">
+                <a:solidFill>
+                  <a:srgbClr val="5A6472"/>
+                </a:solidFill>
+                <a:latin typeface="Calibri" pitchFamily="34" charset="0"/>
+                <a:ea typeface="Calibri" pitchFamily="34" charset="-122"/>
+                <a:cs typeface="Calibri" pitchFamily="34" charset="-120"/>
+              </a:rPr>
+              <a:t>  a IA executa, gente da confiança de vocês valida</a:t>
+            </a:r>
+            <a:endParaRPr lang="en-US" sz="880" dirty="0"/>
+          </a:p>
+        </p:txBody>
+      </p:sp>
+      <p:sp>
+        <p:nvSpPr>
+          <p:cNvPr id="23" name="Text 21"/>
+          <p:cNvSpPr/>
+          <p:nvPr/>
+        </p:nvSpPr>
+        <p:spPr>
+          <a:xfrm>
+            <a:off x="950976" y="5248656"/>
+            <a:ext cx="6080760" cy="219456"/>
+          </a:xfrm>
+          <a:prstGeom prst="rect">
+            <a:avLst/>
+          </a:prstGeom>
+          <a:noFill/>
+          <a:ln/>
+        </p:spPr>
+        <p:txBody>
+          <a:bodyPr wrap="square" lIns="0" tIns="0" rIns="0" bIns="0" rtlCol="0" anchor="ctr"/>
+          <a:lstStyle/>
+          <a:p>
+            <a:pPr indent="0" marL="0">
+              <a:lnSpc>
+                <a:spcPts val="1100"/>
+              </a:lnSpc>
+              <a:buNone/>
+            </a:pPr>
+            <a:r>
+              <a:rPr lang="en-US" sz="880" b="1" dirty="0">
                 <a:solidFill>
                   <a:srgbClr val="B8985A"/>
                 </a:solidFill>
@@ -3687,12 +3966,29 @@
             </a:r>
             <a:pPr indent="0" marL="0">
               <a:lnSpc>
-                <a:spcPts val="1150"/>
-              </a:lnSpc>
-              <a:buNone/>
-            </a:pPr>
-            <a:r>
-              <a:rPr lang="en-US" sz="850" dirty="0">
+                <a:spcPts val="1100"/>
+              </a:lnSpc>
+              <a:buNone/>
+            </a:pPr>
+            <a:r>
+              <a:rPr lang="en-US" sz="880" i="1" dirty="0">
+                <a:solidFill>
+                  <a:srgbClr val="232B3A"/>
+                </a:solidFill>
+                <a:latin typeface="Calibri" pitchFamily="34" charset="0"/>
+                <a:ea typeface="Calibri" pitchFamily="34" charset="-122"/>
+                <a:cs typeface="Calibri" pitchFamily="34" charset="-120"/>
+              </a:rPr>
+              <a:t>“Quem é o nosso ponto focal técnico?”</a:t>
+            </a:r>
+            <a:pPr indent="0" marL="0">
+              <a:lnSpc>
+                <a:spcPts val="1100"/>
+              </a:lnSpc>
+              <a:buNone/>
+            </a:pPr>
+            <a:r>
+              <a:rPr lang="en-US" sz="820" dirty="0">
                 <a:solidFill>
                   <a:srgbClr val="5A6472"/>
                 </a:solidFill>
@@ -3700,105 +3996,7 @@
                 <a:ea typeface="Calibri" pitchFamily="34" charset="-122"/>
                 <a:cs typeface="Calibri" pitchFamily="34" charset="-120"/>
               </a:rPr>
-              <a:t>Prazo: não prometer na hora — “nosso time volta com o desenho, cronograma e critérios por escrito.”</a:t>
-            </a:r>
-            <a:endParaRPr lang="en-US" sz="900" dirty="0"/>
-          </a:p>
-        </p:txBody>
-      </p:sp>
-      <p:sp>
-        <p:nvSpPr>
-          <p:cNvPr id="22" name="Text 20"/>
-          <p:cNvSpPr/>
-          <p:nvPr/>
-        </p:nvSpPr>
-        <p:spPr>
-          <a:xfrm>
-            <a:off x="566928" y="5340096"/>
-            <a:ext cx="6428232" cy="201168"/>
-          </a:xfrm>
-          <a:prstGeom prst="rect">
-            <a:avLst/>
-          </a:prstGeom>
-          <a:noFill/>
-          <a:ln/>
-        </p:spPr>
-        <p:txBody>
-          <a:bodyPr wrap="square" lIns="0" tIns="0" rIns="0" bIns="0" rtlCol="0" anchor="ctr"/>
-          <a:lstStyle/>
-          <a:p>
-            <a:pPr indent="0" marL="0">
-              <a:buNone/>
-            </a:pPr>
-            <a:r>
-              <a:rPr lang="en-US" sz="850" b="1" spc="260" kern="0" dirty="0">
-                <a:solidFill>
-                  <a:srgbClr val="B8985A"/>
-                </a:solidFill>
-                <a:latin typeface="Calibri" pitchFamily="34" charset="0"/>
-                <a:ea typeface="Calibri" pitchFamily="34" charset="-122"/>
-                <a:cs typeface="Calibri" pitchFamily="34" charset="-120"/>
-              </a:rPr>
-              <a:t>NÃO SAIA DA REUNIÃO SEM — OS 10</a:t>
-            </a:r>
-            <a:endParaRPr lang="en-US" sz="850" dirty="0"/>
-          </a:p>
-        </p:txBody>
-      </p:sp>
-      <p:sp>
-        <p:nvSpPr>
-          <p:cNvPr id="23" name="Shape 21"/>
-          <p:cNvSpPr/>
-          <p:nvPr/>
-        </p:nvSpPr>
-        <p:spPr>
-          <a:xfrm>
-            <a:off x="566928" y="5532120"/>
-            <a:ext cx="6428232" cy="1481328"/>
-          </a:xfrm>
-          <a:prstGeom prst="rect">
-            <a:avLst/>
-          </a:prstGeom>
-          <a:solidFill>
-            <a:srgbClr val="F7F4EE"/>
-          </a:solidFill>
-          <a:ln/>
-        </p:spPr>
-      </p:sp>
-      <p:sp>
-        <p:nvSpPr>
-          <p:cNvPr id="24" name="Text 22"/>
-          <p:cNvSpPr/>
-          <p:nvPr/>
-        </p:nvSpPr>
-        <p:spPr>
-          <a:xfrm>
-            <a:off x="749808" y="5605272"/>
-            <a:ext cx="3076956" cy="256032"/>
-          </a:xfrm>
-          <a:prstGeom prst="rect">
-            <a:avLst/>
-          </a:prstGeom>
-          <a:noFill/>
-          <a:ln/>
-        </p:spPr>
-        <p:txBody>
-          <a:bodyPr wrap="square" lIns="0" tIns="0" rIns="0" bIns="0" rtlCol="0" anchor="ctr"/>
-          <a:lstStyle/>
-          <a:p>
-            <a:pPr indent="0" marL="0">
-              <a:buNone/>
-            </a:pPr>
-            <a:r>
-              <a:rPr lang="en-US" sz="880" dirty="0">
-                <a:solidFill>
-                  <a:srgbClr val="232B3A"/>
-                </a:solidFill>
-                <a:latin typeface="Calibri" pitchFamily="34" charset="0"/>
-                <a:ea typeface="Calibri" pitchFamily="34" charset="-122"/>
-                <a:cs typeface="Calibri" pitchFamily="34" charset="-120"/>
-              </a:rPr>
-              <a:t>1  UM caso escolhido (os demais → fila)</a:t>
+              <a:t>  nome + canal</a:t>
             </a:r>
             <a:endParaRPr lang="en-US" sz="880" dirty="0"/>
           </a:p>
@@ -3806,485 +4004,14 @@
       </p:sp>
       <p:sp>
         <p:nvSpPr>
-          <p:cNvPr id="25" name="Text 23"/>
-          <p:cNvSpPr/>
-          <p:nvPr/>
-        </p:nvSpPr>
-        <p:spPr>
-          <a:xfrm>
-            <a:off x="3918204" y="5605272"/>
-            <a:ext cx="3076956" cy="256032"/>
-          </a:xfrm>
-          <a:prstGeom prst="rect">
-            <a:avLst/>
-          </a:prstGeom>
-          <a:noFill/>
-          <a:ln/>
-        </p:spPr>
-        <p:txBody>
-          <a:bodyPr wrap="square" lIns="0" tIns="0" rIns="0" bIns="0" rtlCol="0" anchor="ctr"/>
-          <a:lstStyle/>
-          <a:p>
-            <a:pPr indent="0" marL="0">
-              <a:buNone/>
-            </a:pPr>
-            <a:r>
-              <a:rPr lang="en-US" sz="880" dirty="0">
-                <a:solidFill>
-                  <a:srgbClr val="232B3A"/>
-                </a:solidFill>
-                <a:latin typeface="Calibri" pitchFamily="34" charset="0"/>
-                <a:ea typeface="Calibri" pitchFamily="34" charset="-122"/>
-                <a:cs typeface="Calibri" pitchFamily="34" charset="-120"/>
-              </a:rPr>
-              <a:t>6  Formato real dos dados, visto com os olhos</a:t>
-            </a:r>
-            <a:endParaRPr lang="en-US" sz="880" dirty="0"/>
-          </a:p>
-        </p:txBody>
-      </p:sp>
-      <p:sp>
-        <p:nvSpPr>
-          <p:cNvPr id="26" name="Text 24"/>
-          <p:cNvSpPr/>
-          <p:nvPr/>
-        </p:nvSpPr>
-        <p:spPr>
-          <a:xfrm>
-            <a:off x="749808" y="5879592"/>
-            <a:ext cx="3076956" cy="256032"/>
-          </a:xfrm>
-          <a:prstGeom prst="rect">
-            <a:avLst/>
-          </a:prstGeom>
-          <a:noFill/>
-          <a:ln/>
-        </p:spPr>
-        <p:txBody>
-          <a:bodyPr wrap="square" lIns="0" tIns="0" rIns="0" bIns="0" rtlCol="0" anchor="ctr"/>
-          <a:lstStyle/>
-          <a:p>
-            <a:pPr indent="0" marL="0">
-              <a:buNone/>
-            </a:pPr>
-            <a:r>
-              <a:rPr lang="en-US" sz="880" dirty="0">
-                <a:solidFill>
-                  <a:srgbClr val="232B3A"/>
-                </a:solidFill>
-                <a:latin typeface="Calibri" pitchFamily="34" charset="0"/>
-                <a:ea typeface="Calibri" pitchFamily="34" charset="-122"/>
-                <a:cs typeface="Calibri" pitchFamily="34" charset="-120"/>
-              </a:rPr>
-              <a:t>2  O processo explicável ao time em 5 min</a:t>
-            </a:r>
-            <a:endParaRPr lang="en-US" sz="880" dirty="0"/>
-          </a:p>
-        </p:txBody>
-      </p:sp>
-      <p:sp>
-        <p:nvSpPr>
-          <p:cNvPr id="27" name="Text 25"/>
-          <p:cNvSpPr/>
-          <p:nvPr/>
-        </p:nvSpPr>
-        <p:spPr>
-          <a:xfrm>
-            <a:off x="3918204" y="5879592"/>
-            <a:ext cx="3076956" cy="256032"/>
-          </a:xfrm>
-          <a:prstGeom prst="rect">
-            <a:avLst/>
-          </a:prstGeom>
-          <a:noFill/>
-          <a:ln/>
-        </p:spPr>
-        <p:txBody>
-          <a:bodyPr wrap="square" lIns="0" tIns="0" rIns="0" bIns="0" rtlCol="0" anchor="ctr"/>
-          <a:lstStyle/>
-          <a:p>
-            <a:pPr indent="0" marL="0">
-              <a:buNone/>
-            </a:pPr>
-            <a:r>
-              <a:rPr lang="en-US" sz="880" dirty="0">
-                <a:solidFill>
-                  <a:srgbClr val="232B3A"/>
-                </a:solidFill>
-                <a:latin typeface="Calibri" pitchFamily="34" charset="0"/>
-                <a:ea typeface="Calibri" pitchFamily="34" charset="-122"/>
-                <a:cs typeface="Calibri" pitchFamily="34" charset="-120"/>
-              </a:rPr>
-              <a:t>7  Volume/mês + histórico disponível</a:t>
-            </a:r>
-            <a:endParaRPr lang="en-US" sz="880" dirty="0"/>
-          </a:p>
-        </p:txBody>
-      </p:sp>
-      <p:sp>
-        <p:nvSpPr>
-          <p:cNvPr id="28" name="Text 26"/>
-          <p:cNvSpPr/>
-          <p:nvPr/>
-        </p:nvSpPr>
-        <p:spPr>
-          <a:xfrm>
-            <a:off x="749808" y="6153912"/>
-            <a:ext cx="3076956" cy="256032"/>
-          </a:xfrm>
-          <a:prstGeom prst="rect">
-            <a:avLst/>
-          </a:prstGeom>
-          <a:noFill/>
-          <a:ln/>
-        </p:spPr>
-        <p:txBody>
-          <a:bodyPr wrap="square" lIns="0" tIns="0" rIns="0" bIns="0" rtlCol="0" anchor="ctr"/>
-          <a:lstStyle/>
-          <a:p>
-            <a:pPr indent="0" marL="0">
-              <a:buNone/>
-            </a:pPr>
-            <a:r>
-              <a:rPr lang="en-US" sz="880" dirty="0">
-                <a:solidFill>
-                  <a:srgbClr val="232B3A"/>
-                </a:solidFill>
-                <a:latin typeface="Calibri" pitchFamily="34" charset="0"/>
-                <a:ea typeface="Calibri" pitchFamily="34" charset="-122"/>
-                <a:cs typeface="Calibri" pitchFamily="34" charset="-120"/>
-              </a:rPr>
-              <a:t>3  Baseline em número + onde é medido</a:t>
-            </a:r>
-            <a:endParaRPr lang="en-US" sz="880" dirty="0"/>
-          </a:p>
-        </p:txBody>
-      </p:sp>
-      <p:sp>
-        <p:nvSpPr>
-          <p:cNvPr id="29" name="Text 27"/>
-          <p:cNvSpPr/>
-          <p:nvPr/>
-        </p:nvSpPr>
-        <p:spPr>
-          <a:xfrm>
-            <a:off x="3918204" y="6153912"/>
-            <a:ext cx="3076956" cy="256032"/>
-          </a:xfrm>
-          <a:prstGeom prst="rect">
-            <a:avLst/>
-          </a:prstGeom>
-          <a:noFill/>
-          <a:ln/>
-        </p:spPr>
-        <p:txBody>
-          <a:bodyPr wrap="square" lIns="0" tIns="0" rIns="0" bIns="0" rtlCol="0" anchor="ctr"/>
-          <a:lstStyle/>
-          <a:p>
-            <a:pPr indent="0" marL="0">
-              <a:buNone/>
-            </a:pPr>
-            <a:r>
-              <a:rPr lang="en-US" sz="880" dirty="0">
-                <a:solidFill>
-                  <a:srgbClr val="232B3A"/>
-                </a:solidFill>
-                <a:latin typeface="Calibri" pitchFamily="34" charset="0"/>
-                <a:ea typeface="Calibri" pitchFamily="34" charset="-122"/>
-                <a:cs typeface="Calibri" pitchFamily="34" charset="-120"/>
-              </a:rPr>
-              <a:t>8  Amostra com gabarito prometida (quem/quando)</a:t>
-            </a:r>
-            <a:endParaRPr lang="en-US" sz="880" dirty="0"/>
-          </a:p>
-        </p:txBody>
-      </p:sp>
-      <p:sp>
-        <p:nvSpPr>
-          <p:cNvPr id="30" name="Text 28"/>
-          <p:cNvSpPr/>
-          <p:nvPr/>
-        </p:nvSpPr>
-        <p:spPr>
-          <a:xfrm>
-            <a:off x="749808" y="6428232"/>
-            <a:ext cx="3076956" cy="256032"/>
-          </a:xfrm>
-          <a:prstGeom prst="rect">
-            <a:avLst/>
-          </a:prstGeom>
-          <a:noFill/>
-          <a:ln/>
-        </p:spPr>
-        <p:txBody>
-          <a:bodyPr wrap="square" lIns="0" tIns="0" rIns="0" bIns="0" rtlCol="0" anchor="ctr"/>
-          <a:lstStyle/>
-          <a:p>
-            <a:pPr indent="0" marL="0">
-              <a:buNone/>
-            </a:pPr>
-            <a:r>
-              <a:rPr lang="en-US" sz="880" dirty="0">
-                <a:solidFill>
-                  <a:srgbClr val="232B3A"/>
-                </a:solidFill>
-                <a:latin typeface="Calibri" pitchFamily="34" charset="0"/>
-                <a:ea typeface="Calibri" pitchFamily="34" charset="-122"/>
-                <a:cs typeface="Calibri" pitchFamily="34" charset="-120"/>
-              </a:rPr>
-              <a:t>4  A meta que define GO, dita por eles</a:t>
-            </a:r>
-            <a:endParaRPr lang="en-US" sz="880" dirty="0"/>
-          </a:p>
-        </p:txBody>
-      </p:sp>
-      <p:sp>
-        <p:nvSpPr>
-          <p:cNvPr id="31" name="Text 29"/>
-          <p:cNvSpPr/>
-          <p:nvPr/>
-        </p:nvSpPr>
-        <p:spPr>
-          <a:xfrm>
-            <a:off x="3918204" y="6428232"/>
-            <a:ext cx="3076956" cy="256032"/>
-          </a:xfrm>
-          <a:prstGeom prst="rect">
-            <a:avLst/>
-          </a:prstGeom>
-          <a:noFill/>
-          <a:ln/>
-        </p:spPr>
-        <p:txBody>
-          <a:bodyPr wrap="square" lIns="0" tIns="0" rIns="0" bIns="0" rtlCol="0" anchor="ctr"/>
-          <a:lstStyle/>
-          <a:p>
-            <a:pPr indent="0" marL="0">
-              <a:buNone/>
-            </a:pPr>
-            <a:r>
-              <a:rPr lang="en-US" sz="880" dirty="0">
-                <a:solidFill>
-                  <a:srgbClr val="232B3A"/>
-                </a:solidFill>
-                <a:latin typeface="Calibri" pitchFamily="34" charset="0"/>
-                <a:ea typeface="Calibri" pitchFamily="34" charset="-122"/>
-                <a:cs typeface="Calibri" pitchFamily="34" charset="-120"/>
-              </a:rPr>
-              <a:t>9  Usuário-chave + ponto focal técnico</a:t>
-            </a:r>
-            <a:endParaRPr lang="en-US" sz="880" dirty="0"/>
-          </a:p>
-        </p:txBody>
-      </p:sp>
-      <p:sp>
-        <p:nvSpPr>
-          <p:cNvPr id="32" name="Text 30"/>
-          <p:cNvSpPr/>
-          <p:nvPr/>
-        </p:nvSpPr>
-        <p:spPr>
-          <a:xfrm>
-            <a:off x="749808" y="6702552"/>
-            <a:ext cx="3076956" cy="256032"/>
-          </a:xfrm>
-          <a:prstGeom prst="rect">
-            <a:avLst/>
-          </a:prstGeom>
-          <a:noFill/>
-          <a:ln/>
-        </p:spPr>
-        <p:txBody>
-          <a:bodyPr wrap="square" lIns="0" tIns="0" rIns="0" bIns="0" rtlCol="0" anchor="ctr"/>
-          <a:lstStyle/>
-          <a:p>
-            <a:pPr indent="0" marL="0">
-              <a:buNone/>
-            </a:pPr>
-            <a:r>
-              <a:rPr lang="en-US" sz="880" dirty="0">
-                <a:solidFill>
-                  <a:srgbClr val="232B3A"/>
-                </a:solidFill>
-                <a:latin typeface="Calibri" pitchFamily="34" charset="0"/>
-                <a:ea typeface="Calibri" pitchFamily="34" charset="-122"/>
-                <a:cs typeface="Calibri" pitchFamily="34" charset="-120"/>
-              </a:rPr>
-              <a:t>5  Sistemas com nome próprio (nuvem × local)</a:t>
-            </a:r>
-            <a:endParaRPr lang="en-US" sz="880" dirty="0"/>
-          </a:p>
-        </p:txBody>
-      </p:sp>
-      <p:sp>
-        <p:nvSpPr>
-          <p:cNvPr id="33" name="Text 31"/>
-          <p:cNvSpPr/>
-          <p:nvPr/>
-        </p:nvSpPr>
-        <p:spPr>
-          <a:xfrm>
-            <a:off x="3918204" y="6702552"/>
-            <a:ext cx="3076956" cy="256032"/>
-          </a:xfrm>
-          <a:prstGeom prst="rect">
-            <a:avLst/>
-          </a:prstGeom>
-          <a:noFill/>
-          <a:ln/>
-        </p:spPr>
-        <p:txBody>
-          <a:bodyPr wrap="square" lIns="0" tIns="0" rIns="0" bIns="0" rtlCol="0" anchor="ctr"/>
-          <a:lstStyle/>
-          <a:p>
-            <a:pPr indent="0" marL="0">
-              <a:buNone/>
-            </a:pPr>
-            <a:r>
-              <a:rPr lang="en-US" sz="880" dirty="0">
-                <a:solidFill>
-                  <a:srgbClr val="232B3A"/>
-                </a:solidFill>
-                <a:latin typeface="Calibri" pitchFamily="34" charset="0"/>
-                <a:ea typeface="Calibri" pitchFamily="34" charset="-122"/>
-                <a:cs typeface="Calibri" pitchFamily="34" charset="-120"/>
-              </a:rPr>
-              <a:t>10  Dados podem sair? Quem autoriza acesso?</a:t>
-            </a:r>
-            <a:endParaRPr lang="en-US" sz="880" dirty="0"/>
-          </a:p>
-        </p:txBody>
-      </p:sp>
-      <p:sp>
-        <p:nvSpPr>
-          <p:cNvPr id="34" name="Text 32"/>
-          <p:cNvSpPr/>
-          <p:nvPr/>
-        </p:nvSpPr>
-        <p:spPr>
-          <a:xfrm>
-            <a:off x="566928" y="7178040"/>
-            <a:ext cx="6428232" cy="201168"/>
-          </a:xfrm>
-          <a:prstGeom prst="rect">
-            <a:avLst/>
-          </a:prstGeom>
-          <a:noFill/>
-          <a:ln/>
-        </p:spPr>
-        <p:txBody>
-          <a:bodyPr wrap="square" lIns="0" tIns="0" rIns="0" bIns="0" rtlCol="0" anchor="ctr"/>
-          <a:lstStyle/>
-          <a:p>
-            <a:pPr indent="0" marL="0">
-              <a:buNone/>
-            </a:pPr>
-            <a:r>
-              <a:rPr lang="en-US" sz="850" b="1" spc="260" kern="0" dirty="0">
-                <a:solidFill>
-                  <a:srgbClr val="B8985A"/>
-                </a:solidFill>
-                <a:latin typeface="Calibri" pitchFamily="34" charset="0"/>
-                <a:ea typeface="Calibri" pitchFamily="34" charset="-122"/>
-                <a:cs typeface="Calibri" pitchFamily="34" charset="-120"/>
-              </a:rPr>
-              <a:t>SINAIS DE ALERTA — MUDAM A CONVERSA, NÃO MATAM A REUNIÃO</a:t>
-            </a:r>
-            <a:endParaRPr lang="en-US" sz="850" dirty="0"/>
-          </a:p>
-        </p:txBody>
-      </p:sp>
-      <p:sp>
-        <p:nvSpPr>
-          <p:cNvPr id="35" name="Text 33"/>
-          <p:cNvSpPr/>
-          <p:nvPr/>
-        </p:nvSpPr>
-        <p:spPr>
-          <a:xfrm>
-            <a:off x="566928" y="7415784"/>
-            <a:ext cx="6428232" cy="621792"/>
-          </a:xfrm>
-          <a:prstGeom prst="rect">
-            <a:avLst/>
-          </a:prstGeom>
-          <a:noFill/>
-          <a:ln/>
-        </p:spPr>
-        <p:txBody>
-          <a:bodyPr wrap="square" lIns="0" tIns="0" rIns="0" bIns="0" rtlCol="0" anchor="ctr"/>
-          <a:lstStyle/>
-          <a:p>
-            <a:pPr indent="0" marL="0">
-              <a:lnSpc>
-                <a:spcPts val="1200"/>
-              </a:lnSpc>
-              <a:buNone/>
-            </a:pPr>
-            <a:r>
-              <a:rPr lang="en-US" sz="880" dirty="0">
-                <a:solidFill>
-                  <a:srgbClr val="232B3A"/>
-                </a:solidFill>
-                <a:latin typeface="Calibri" pitchFamily="34" charset="0"/>
-                <a:ea typeface="Calibri" pitchFamily="34" charset="-122"/>
-                <a:cs typeface="Calibri" pitchFamily="34" charset="-120"/>
-              </a:rPr>
-              <a:t>Sem dado acessível → protótipo começa capturando o dado · Sem número → 1ª semana mede o hoje · “Automatizar tudo” → “tudo começa por um. Qual?” · Ninguém conhece as exceções → chamada de 30 min com a pessoa certa antes do desenho · Dado preso + sem infra → desenho especial, sem prazo na hora.</a:t>
-            </a:r>
-            <a:endParaRPr lang="en-US" sz="880" dirty="0"/>
-          </a:p>
-        </p:txBody>
-      </p:sp>
-      <p:sp>
-        <p:nvSpPr>
-          <p:cNvPr id="36" name="Text 34"/>
-          <p:cNvSpPr/>
-          <p:nvPr/>
-        </p:nvSpPr>
-        <p:spPr>
-          <a:xfrm>
-            <a:off x="566928" y="8092440"/>
-            <a:ext cx="6428232" cy="274320"/>
-          </a:xfrm>
-          <a:prstGeom prst="rect">
-            <a:avLst/>
-          </a:prstGeom>
-          <a:noFill/>
-          <a:ln/>
-        </p:spPr>
-        <p:txBody>
-          <a:bodyPr wrap="square" lIns="0" tIns="0" rIns="0" bIns="0" rtlCol="0" anchor="ctr"/>
-          <a:lstStyle/>
-          <a:p>
-            <a:pPr indent="0" marL="0">
-              <a:buNone/>
-            </a:pPr>
-            <a:r>
-              <a:rPr lang="en-US" sz="950" i="1" dirty="0">
-                <a:solidFill>
-                  <a:srgbClr val="B8985A"/>
-                </a:solidFill>
-                <a:latin typeface="Cambria" pitchFamily="34" charset="0"/>
-                <a:ea typeface="Cambria" pitchFamily="34" charset="-122"/>
-                <a:cs typeface="Cambria" pitchFamily="34" charset="-120"/>
-              </a:rPr>
-              <a:t>Depois da reunião, mesmo dia: registro dos 6 blocos ao time — o que faltar vira pergunta ao ponto focal, não segunda reunião.</a:t>
-            </a:r>
-            <a:endParaRPr lang="en-US" sz="950" dirty="0"/>
-          </a:p>
-        </p:txBody>
-      </p:sp>
-      <p:sp>
-        <p:nvSpPr>
-          <p:cNvPr id="37" name="Shape 35"/>
-          <p:cNvSpPr/>
-          <p:nvPr/>
-        </p:nvSpPr>
-        <p:spPr>
-          <a:xfrm>
-            <a:off x="566928" y="10241280"/>
-            <a:ext cx="6428232" cy="0"/>
+          <p:cNvPr id="24" name="Shape 22"/>
+          <p:cNvSpPr/>
+          <p:nvPr/>
+        </p:nvSpPr>
+        <p:spPr>
+          <a:xfrm>
+            <a:off x="950976" y="5532120"/>
+            <a:ext cx="6080760" cy="0"/>
           </a:xfrm>
           <a:prstGeom prst="line">
             <a:avLst/>
@@ -4300,13 +4027,952 @@
       </p:sp>
       <p:sp>
         <p:nvSpPr>
+          <p:cNvPr id="25" name="Text 23"/>
+          <p:cNvSpPr/>
+          <p:nvPr/>
+        </p:nvSpPr>
+        <p:spPr>
+          <a:xfrm>
+            <a:off x="484632" y="5586984"/>
+            <a:ext cx="457200" cy="457200"/>
+          </a:xfrm>
+          <a:prstGeom prst="rect">
+            <a:avLst/>
+          </a:prstGeom>
+          <a:noFill/>
+          <a:ln/>
+        </p:spPr>
+        <p:txBody>
+          <a:bodyPr wrap="square" lIns="0" tIns="0" rIns="0" bIns="0" rtlCol="0" anchor="ctr"/>
+          <a:lstStyle/>
+          <a:p>
+            <a:pPr indent="0" marL="0">
+              <a:buNone/>
+            </a:pPr>
+            <a:r>
+              <a:rPr lang="en-US" sz="2000" b="1" dirty="0">
+                <a:solidFill>
+                  <a:srgbClr val="B8985A"/>
+                </a:solidFill>
+                <a:latin typeface="Cambria" pitchFamily="34" charset="0"/>
+                <a:ea typeface="Cambria" pitchFamily="34" charset="-122"/>
+                <a:cs typeface="Cambria" pitchFamily="34" charset="-120"/>
+              </a:rPr>
+              <a:t>7</a:t>
+            </a:r>
+            <a:endParaRPr lang="en-US" sz="2000" dirty="0"/>
+          </a:p>
+        </p:txBody>
+      </p:sp>
+      <p:sp>
+        <p:nvSpPr>
+          <p:cNvPr id="26" name="Text 24"/>
+          <p:cNvSpPr/>
+          <p:nvPr/>
+        </p:nvSpPr>
+        <p:spPr>
+          <a:xfrm>
+            <a:off x="950976" y="5641848"/>
+            <a:ext cx="6080760" cy="228600"/>
+          </a:xfrm>
+          <a:prstGeom prst="rect">
+            <a:avLst/>
+          </a:prstGeom>
+          <a:noFill/>
+          <a:ln/>
+        </p:spPr>
+        <p:txBody>
+          <a:bodyPr wrap="square" lIns="0" tIns="0" rIns="0" bIns="0" rtlCol="0" anchor="ctr"/>
+          <a:lstStyle/>
+          <a:p>
+            <a:pPr indent="0" marL="0">
+              <a:buNone/>
+            </a:pPr>
+            <a:r>
+              <a:rPr lang="en-US" sz="1200" b="1" dirty="0">
+                <a:solidFill>
+                  <a:srgbClr val="1B2A4A"/>
+                </a:solidFill>
+                <a:latin typeface="Cambria" pitchFamily="34" charset="0"/>
+                <a:ea typeface="Cambria" pitchFamily="34" charset="-122"/>
+                <a:cs typeface="Cambria" pitchFamily="34" charset="-120"/>
+              </a:rPr>
+              <a:t>Restrições e logística</a:t>
+            </a:r>
+            <a:pPr indent="0" marL="0">
+              <a:buNone/>
+            </a:pPr>
+            <a:r>
+              <a:rPr lang="en-US" sz="800" dirty="0">
+                <a:solidFill>
+                  <a:srgbClr val="5A6472"/>
+                </a:solidFill>
+                <a:latin typeface="Calibri" pitchFamily="34" charset="0"/>
+                <a:ea typeface="Calibri" pitchFamily="34" charset="-122"/>
+                <a:cs typeface="Calibri" pitchFamily="34" charset="-120"/>
+              </a:rPr>
+              <a:t>   · 5 min</a:t>
+            </a:r>
+            <a:endParaRPr lang="en-US" sz="1200" dirty="0"/>
+          </a:p>
+        </p:txBody>
+      </p:sp>
+      <p:sp>
+        <p:nvSpPr>
+          <p:cNvPr id="27" name="Text 25"/>
+          <p:cNvSpPr/>
+          <p:nvPr/>
+        </p:nvSpPr>
+        <p:spPr>
+          <a:xfrm>
+            <a:off x="950976" y="5907024"/>
+            <a:ext cx="6080760" cy="219456"/>
+          </a:xfrm>
+          <a:prstGeom prst="rect">
+            <a:avLst/>
+          </a:prstGeom>
+          <a:noFill/>
+          <a:ln/>
+        </p:spPr>
+        <p:txBody>
+          <a:bodyPr wrap="square" lIns="0" tIns="0" rIns="0" bIns="0" rtlCol="0" anchor="ctr"/>
+          <a:lstStyle/>
+          <a:p>
+            <a:pPr indent="0" marL="0">
+              <a:lnSpc>
+                <a:spcPts val="1100"/>
+              </a:lnSpc>
+              <a:buNone/>
+            </a:pPr>
+            <a:r>
+              <a:rPr lang="en-US" sz="880" b="1" dirty="0">
+                <a:solidFill>
+                  <a:srgbClr val="B8985A"/>
+                </a:solidFill>
+                <a:latin typeface="Calibri" pitchFamily="34" charset="0"/>
+                <a:ea typeface="Calibri" pitchFamily="34" charset="-122"/>
+                <a:cs typeface="Calibri" pitchFamily="34" charset="-120"/>
+              </a:rPr>
+              <a:t>— </a:t>
+            </a:r>
+            <a:pPr indent="0" marL="0">
+              <a:lnSpc>
+                <a:spcPts val="1100"/>
+              </a:lnSpc>
+              <a:buNone/>
+            </a:pPr>
+            <a:r>
+              <a:rPr lang="en-US" sz="880" i="1" dirty="0">
+                <a:solidFill>
+                  <a:srgbClr val="232B3A"/>
+                </a:solidFill>
+                <a:latin typeface="Calibri" pitchFamily="34" charset="0"/>
+                <a:ea typeface="Calibri" pitchFamily="34" charset="-122"/>
+                <a:cs typeface="Calibri" pitchFamily="34" charset="-120"/>
+              </a:rPr>
+              <a:t>“Precisa de NDA antes da amostra? Quem autoriza acessos?”</a:t>
+            </a:r>
+            <a:endParaRPr lang="en-US" sz="880" dirty="0"/>
+          </a:p>
+        </p:txBody>
+      </p:sp>
+      <p:sp>
+        <p:nvSpPr>
+          <p:cNvPr id="28" name="Text 26"/>
+          <p:cNvSpPr/>
+          <p:nvPr/>
+        </p:nvSpPr>
+        <p:spPr>
+          <a:xfrm>
+            <a:off x="950976" y="6163056"/>
+            <a:ext cx="6080760" cy="219456"/>
+          </a:xfrm>
+          <a:prstGeom prst="rect">
+            <a:avLst/>
+          </a:prstGeom>
+          <a:noFill/>
+          <a:ln/>
+        </p:spPr>
+        <p:txBody>
+          <a:bodyPr wrap="square" lIns="0" tIns="0" rIns="0" bIns="0" rtlCol="0" anchor="ctr"/>
+          <a:lstStyle/>
+          <a:p>
+            <a:pPr indent="0" marL="0">
+              <a:lnSpc>
+                <a:spcPts val="1100"/>
+              </a:lnSpc>
+              <a:buNone/>
+            </a:pPr>
+            <a:r>
+              <a:rPr lang="en-US" sz="880" b="1" dirty="0">
+                <a:solidFill>
+                  <a:srgbClr val="B8985A"/>
+                </a:solidFill>
+                <a:latin typeface="Calibri" pitchFamily="34" charset="0"/>
+                <a:ea typeface="Calibri" pitchFamily="34" charset="-122"/>
+                <a:cs typeface="Calibri" pitchFamily="34" charset="-120"/>
+              </a:rPr>
+              <a:t>— </a:t>
+            </a:r>
+            <a:pPr indent="0" marL="0">
+              <a:lnSpc>
+                <a:spcPts val="1100"/>
+              </a:lnSpc>
+              <a:buNone/>
+            </a:pPr>
+            <a:r>
+              <a:rPr lang="en-US" sz="880" i="1" dirty="0">
+                <a:solidFill>
+                  <a:srgbClr val="232B3A"/>
+                </a:solidFill>
+                <a:latin typeface="Calibri" pitchFamily="34" charset="0"/>
+                <a:ea typeface="Calibri" pitchFamily="34" charset="-122"/>
+                <a:cs typeface="Calibri" pitchFamily="34" charset="-120"/>
+              </a:rPr>
+              <a:t>“Se bater a meta, quem decide o passo seguinte — e em que fórum?”</a:t>
+            </a:r>
+            <a:endParaRPr lang="en-US" sz="880" dirty="0"/>
+          </a:p>
+        </p:txBody>
+      </p:sp>
+      <p:sp>
+        <p:nvSpPr>
+          <p:cNvPr id="29" name="Text 27"/>
+          <p:cNvSpPr/>
+          <p:nvPr/>
+        </p:nvSpPr>
+        <p:spPr>
+          <a:xfrm>
+            <a:off x="950976" y="6419088"/>
+            <a:ext cx="6080760" cy="237744"/>
+          </a:xfrm>
+          <a:prstGeom prst="rect">
+            <a:avLst/>
+          </a:prstGeom>
+          <a:noFill/>
+          <a:ln/>
+        </p:spPr>
+        <p:txBody>
+          <a:bodyPr wrap="square" lIns="0" tIns="0" rIns="0" bIns="0" rtlCol="0" anchor="ctr"/>
+          <a:lstStyle/>
+          <a:p>
+            <a:pPr indent="0" marL="0">
+              <a:lnSpc>
+                <a:spcPts val="1100"/>
+              </a:lnSpc>
+              <a:buNone/>
+            </a:pPr>
+            <a:r>
+              <a:rPr lang="en-US" sz="880" b="1" dirty="0">
+                <a:solidFill>
+                  <a:srgbClr val="B8985A"/>
+                </a:solidFill>
+                <a:latin typeface="Calibri" pitchFamily="34" charset="0"/>
+                <a:ea typeface="Calibri" pitchFamily="34" charset="-122"/>
+                <a:cs typeface="Calibri" pitchFamily="34" charset="-120"/>
+              </a:rPr>
+              <a:t>— </a:t>
+            </a:r>
+            <a:pPr indent="0" marL="0">
+              <a:lnSpc>
+                <a:spcPts val="1100"/>
+              </a:lnSpc>
+              <a:buNone/>
+            </a:pPr>
+            <a:r>
+              <a:rPr lang="en-US" sz="820" dirty="0">
+                <a:solidFill>
+                  <a:srgbClr val="5A6472"/>
+                </a:solidFill>
+                <a:latin typeface="Calibri" pitchFamily="34" charset="0"/>
+                <a:ea typeface="Calibri" pitchFamily="34" charset="-122"/>
+                <a:cs typeface="Calibri" pitchFamily="34" charset="-120"/>
+              </a:rPr>
+              <a:t>Prazo: não prometer na hora — “nosso time volta com o desenho, cronograma e critérios por escrito.”</a:t>
+            </a:r>
+            <a:endParaRPr lang="en-US" sz="880" dirty="0"/>
+          </a:p>
+        </p:txBody>
+      </p:sp>
+      <p:sp>
+        <p:nvSpPr>
+          <p:cNvPr id="30" name="Text 28"/>
+          <p:cNvSpPr/>
+          <p:nvPr/>
+        </p:nvSpPr>
+        <p:spPr>
+          <a:xfrm>
+            <a:off x="530352" y="6848856"/>
+            <a:ext cx="6501384" cy="201168"/>
+          </a:xfrm>
+          <a:prstGeom prst="rect">
+            <a:avLst/>
+          </a:prstGeom>
+          <a:noFill/>
+          <a:ln/>
+        </p:spPr>
+        <p:txBody>
+          <a:bodyPr wrap="square" lIns="0" tIns="0" rIns="0" bIns="0" rtlCol="0" anchor="ctr"/>
+          <a:lstStyle/>
+          <a:p>
+            <a:pPr indent="0" marL="0">
+              <a:buNone/>
+            </a:pPr>
+            <a:r>
+              <a:rPr lang="en-US" sz="850" b="1" spc="240" kern="0" dirty="0">
+                <a:solidFill>
+                  <a:srgbClr val="B8985A"/>
+                </a:solidFill>
+                <a:latin typeface="Calibri" pitchFamily="34" charset="0"/>
+                <a:ea typeface="Calibri" pitchFamily="34" charset="-122"/>
+                <a:cs typeface="Calibri" pitchFamily="34" charset="-120"/>
+              </a:rPr>
+              <a:t>NÃO SAIA DA REUNIÃO SEM — OS 12</a:t>
+            </a:r>
+            <a:endParaRPr lang="en-US" sz="850" dirty="0"/>
+          </a:p>
+        </p:txBody>
+      </p:sp>
+      <p:sp>
+        <p:nvSpPr>
+          <p:cNvPr id="31" name="Shape 29"/>
+          <p:cNvSpPr/>
+          <p:nvPr/>
+        </p:nvSpPr>
+        <p:spPr>
+          <a:xfrm>
+            <a:off x="530352" y="7040880"/>
+            <a:ext cx="6501384" cy="1572768"/>
+          </a:xfrm>
+          <a:prstGeom prst="rect">
+            <a:avLst/>
+          </a:prstGeom>
+          <a:solidFill>
+            <a:srgbClr val="F7F4EE"/>
+          </a:solidFill>
+          <a:ln/>
+        </p:spPr>
+      </p:sp>
+      <p:sp>
+        <p:nvSpPr>
+          <p:cNvPr id="32" name="Text 30"/>
+          <p:cNvSpPr/>
+          <p:nvPr/>
+        </p:nvSpPr>
+        <p:spPr>
+          <a:xfrm>
+            <a:off x="694944" y="7104888"/>
+            <a:ext cx="3113532" cy="228600"/>
+          </a:xfrm>
+          <a:prstGeom prst="rect">
+            <a:avLst/>
+          </a:prstGeom>
+          <a:noFill/>
+          <a:ln/>
+        </p:spPr>
+        <p:txBody>
+          <a:bodyPr wrap="square" lIns="0" tIns="0" rIns="0" bIns="0" rtlCol="0" anchor="ctr"/>
+          <a:lstStyle/>
+          <a:p>
+            <a:pPr indent="0" marL="0">
+              <a:buNone/>
+            </a:pPr>
+            <a:r>
+              <a:rPr lang="en-US" sz="840" dirty="0">
+                <a:solidFill>
+                  <a:srgbClr val="232B3A"/>
+                </a:solidFill>
+                <a:latin typeface="Calibri" pitchFamily="34" charset="0"/>
+                <a:ea typeface="Calibri" pitchFamily="34" charset="-122"/>
+                <a:cs typeface="Calibri" pitchFamily="34" charset="-120"/>
+              </a:rPr>
+              <a:t>1  UM caso escolhido (demais → fila)</a:t>
+            </a:r>
+            <a:endParaRPr lang="en-US" sz="840" dirty="0"/>
+          </a:p>
+        </p:txBody>
+      </p:sp>
+      <p:sp>
+        <p:nvSpPr>
+          <p:cNvPr id="33" name="Text 31"/>
+          <p:cNvSpPr/>
+          <p:nvPr/>
+        </p:nvSpPr>
+        <p:spPr>
+          <a:xfrm>
+            <a:off x="3899916" y="7104888"/>
+            <a:ext cx="3113532" cy="228600"/>
+          </a:xfrm>
+          <a:prstGeom prst="rect">
+            <a:avLst/>
+          </a:prstGeom>
+          <a:noFill/>
+          <a:ln/>
+        </p:spPr>
+        <p:txBody>
+          <a:bodyPr wrap="square" lIns="0" tIns="0" rIns="0" bIns="0" rtlCol="0" anchor="ctr"/>
+          <a:lstStyle/>
+          <a:p>
+            <a:pPr indent="0" marL="0">
+              <a:buNone/>
+            </a:pPr>
+            <a:r>
+              <a:rPr lang="en-US" sz="840" dirty="0">
+                <a:solidFill>
+                  <a:srgbClr val="232B3A"/>
+                </a:solidFill>
+                <a:latin typeface="Calibri" pitchFamily="34" charset="0"/>
+                <a:ea typeface="Calibri" pitchFamily="34" charset="-122"/>
+                <a:cs typeface="Calibri" pitchFamily="34" charset="-120"/>
+              </a:rPr>
+              <a:t>7  Onde está escrito como fazer certo</a:t>
+            </a:r>
+            <a:endParaRPr lang="en-US" sz="840" dirty="0"/>
+          </a:p>
+        </p:txBody>
+      </p:sp>
+      <p:sp>
+        <p:nvSpPr>
+          <p:cNvPr id="34" name="Text 32"/>
+          <p:cNvSpPr/>
+          <p:nvPr/>
+        </p:nvSpPr>
+        <p:spPr>
+          <a:xfrm>
+            <a:off x="694944" y="7351776"/>
+            <a:ext cx="3113532" cy="228600"/>
+          </a:xfrm>
+          <a:prstGeom prst="rect">
+            <a:avLst/>
+          </a:prstGeom>
+          <a:noFill/>
+          <a:ln/>
+        </p:spPr>
+        <p:txBody>
+          <a:bodyPr wrap="square" lIns="0" tIns="0" rIns="0" bIns="0" rtlCol="0" anchor="ctr"/>
+          <a:lstStyle/>
+          <a:p>
+            <a:pPr indent="0" marL="0">
+              <a:buNone/>
+            </a:pPr>
+            <a:r>
+              <a:rPr lang="en-US" sz="840" dirty="0">
+                <a:solidFill>
+                  <a:srgbClr val="232B3A"/>
+                </a:solidFill>
+                <a:latin typeface="Calibri" pitchFamily="34" charset="0"/>
+                <a:ea typeface="Calibri" pitchFamily="34" charset="-122"/>
+                <a:cs typeface="Calibri" pitchFamily="34" charset="-120"/>
+              </a:rPr>
+              <a:t>2  Processo + gatilho + ritmo (hora × lote)</a:t>
+            </a:r>
+            <a:endParaRPr lang="en-US" sz="840" dirty="0"/>
+          </a:p>
+        </p:txBody>
+      </p:sp>
+      <p:sp>
+        <p:nvSpPr>
+          <p:cNvPr id="35" name="Text 33"/>
+          <p:cNvSpPr/>
+          <p:nvPr/>
+        </p:nvSpPr>
+        <p:spPr>
+          <a:xfrm>
+            <a:off x="3899916" y="7351776"/>
+            <a:ext cx="3113532" cy="228600"/>
+          </a:xfrm>
+          <a:prstGeom prst="rect">
+            <a:avLst/>
+          </a:prstGeom>
+          <a:noFill/>
+          <a:ln/>
+        </p:spPr>
+        <p:txBody>
+          <a:bodyPr wrap="square" lIns="0" tIns="0" rIns="0" bIns="0" rtlCol="0" anchor="ctr"/>
+          <a:lstStyle/>
+          <a:p>
+            <a:pPr indent="0" marL="0">
+              <a:buNone/>
+            </a:pPr>
+            <a:r>
+              <a:rPr lang="en-US" sz="840" dirty="0">
+                <a:solidFill>
+                  <a:srgbClr val="232B3A"/>
+                </a:solidFill>
+                <a:latin typeface="Calibri" pitchFamily="34" charset="0"/>
+                <a:ea typeface="Calibri" pitchFamily="34" charset="-122"/>
+                <a:cs typeface="Calibri" pitchFamily="34" charset="-120"/>
+              </a:rPr>
+              <a:t>8  Sistemas com nome (nuvem × local)</a:t>
+            </a:r>
+            <a:endParaRPr lang="en-US" sz="840" dirty="0"/>
+          </a:p>
+        </p:txBody>
+      </p:sp>
+      <p:sp>
+        <p:nvSpPr>
+          <p:cNvPr id="36" name="Text 34"/>
+          <p:cNvSpPr/>
+          <p:nvPr/>
+        </p:nvSpPr>
+        <p:spPr>
+          <a:xfrm>
+            <a:off x="694944" y="7598664"/>
+            <a:ext cx="3113532" cy="228600"/>
+          </a:xfrm>
+          <a:prstGeom prst="rect">
+            <a:avLst/>
+          </a:prstGeom>
+          <a:noFill/>
+          <a:ln/>
+        </p:spPr>
+        <p:txBody>
+          <a:bodyPr wrap="square" lIns="0" tIns="0" rIns="0" bIns="0" rtlCol="0" anchor="ctr"/>
+          <a:lstStyle/>
+          <a:p>
+            <a:pPr indent="0" marL="0">
+              <a:buNone/>
+            </a:pPr>
+            <a:r>
+              <a:rPr lang="en-US" sz="840" dirty="0">
+                <a:solidFill>
+                  <a:srgbClr val="232B3A"/>
+                </a:solidFill>
+                <a:latin typeface="Calibri" pitchFamily="34" charset="0"/>
+                <a:ea typeface="Calibri" pitchFamily="34" charset="-122"/>
+                <a:cs typeface="Calibri" pitchFamily="34" charset="-120"/>
+              </a:rPr>
+              <a:t>3  Baseline em número + onde é medido</a:t>
+            </a:r>
+            <a:endParaRPr lang="en-US" sz="840" dirty="0"/>
+          </a:p>
+        </p:txBody>
+      </p:sp>
+      <p:sp>
+        <p:nvSpPr>
+          <p:cNvPr id="37" name="Text 35"/>
+          <p:cNvSpPr/>
+          <p:nvPr/>
+        </p:nvSpPr>
+        <p:spPr>
+          <a:xfrm>
+            <a:off x="3899916" y="7598664"/>
+            <a:ext cx="3113532" cy="228600"/>
+          </a:xfrm>
+          <a:prstGeom prst="rect">
+            <a:avLst/>
+          </a:prstGeom>
+          <a:noFill/>
+          <a:ln/>
+        </p:spPr>
+        <p:txBody>
+          <a:bodyPr wrap="square" lIns="0" tIns="0" rIns="0" bIns="0" rtlCol="0" anchor="ctr"/>
+          <a:lstStyle/>
+          <a:p>
+            <a:pPr indent="0" marL="0">
+              <a:buNone/>
+            </a:pPr>
+            <a:r>
+              <a:rPr lang="en-US" sz="840" dirty="0">
+                <a:solidFill>
+                  <a:srgbClr val="232B3A"/>
+                </a:solidFill>
+                <a:latin typeface="Calibri" pitchFamily="34" charset="0"/>
+                <a:ea typeface="Calibri" pitchFamily="34" charset="-122"/>
+                <a:cs typeface="Calibri" pitchFamily="34" charset="-120"/>
+              </a:rPr>
+              <a:t>9  Formato real visto + destino da saída</a:t>
+            </a:r>
+            <a:endParaRPr lang="en-US" sz="840" dirty="0"/>
+          </a:p>
+        </p:txBody>
+      </p:sp>
+      <p:sp>
+        <p:nvSpPr>
           <p:cNvPr id="38" name="Text 36"/>
           <p:cNvSpPr/>
           <p:nvPr/>
         </p:nvSpPr>
         <p:spPr>
           <a:xfrm>
-            <a:off x="566928" y="10314432"/>
+            <a:off x="694944" y="7845552"/>
+            <a:ext cx="3113532" cy="228600"/>
+          </a:xfrm>
+          <a:prstGeom prst="rect">
+            <a:avLst/>
+          </a:prstGeom>
+          <a:noFill/>
+          <a:ln/>
+        </p:spPr>
+        <p:txBody>
+          <a:bodyPr wrap="square" lIns="0" tIns="0" rIns="0" bIns="0" rtlCol="0" anchor="ctr"/>
+          <a:lstStyle/>
+          <a:p>
+            <a:pPr indent="0" marL="0">
+              <a:buNone/>
+            </a:pPr>
+            <a:r>
+              <a:rPr lang="en-US" sz="840" dirty="0">
+                <a:solidFill>
+                  <a:srgbClr val="232B3A"/>
+                </a:solidFill>
+                <a:latin typeface="Calibri" pitchFamily="34" charset="0"/>
+                <a:ea typeface="Calibri" pitchFamily="34" charset="-122"/>
+                <a:cs typeface="Calibri" pitchFamily="34" charset="-120"/>
+              </a:rPr>
+              <a:t>4  A meta que define GO, dita por eles</a:t>
+            </a:r>
+            <a:endParaRPr lang="en-US" sz="840" dirty="0"/>
+          </a:p>
+        </p:txBody>
+      </p:sp>
+      <p:sp>
+        <p:nvSpPr>
+          <p:cNvPr id="39" name="Text 37"/>
+          <p:cNvSpPr/>
+          <p:nvPr/>
+        </p:nvSpPr>
+        <p:spPr>
+          <a:xfrm>
+            <a:off x="3899916" y="7845552"/>
+            <a:ext cx="3113532" cy="228600"/>
+          </a:xfrm>
+          <a:prstGeom prst="rect">
+            <a:avLst/>
+          </a:prstGeom>
+          <a:noFill/>
+          <a:ln/>
+        </p:spPr>
+        <p:txBody>
+          <a:bodyPr wrap="square" lIns="0" tIns="0" rIns="0" bIns="0" rtlCol="0" anchor="ctr"/>
+          <a:lstStyle/>
+          <a:p>
+            <a:pPr indent="0" marL="0">
+              <a:buNone/>
+            </a:pPr>
+            <a:r>
+              <a:rPr lang="en-US" sz="840" dirty="0">
+                <a:solidFill>
+                  <a:srgbClr val="232B3A"/>
+                </a:solidFill>
+                <a:latin typeface="Calibri" pitchFamily="34" charset="0"/>
+                <a:ea typeface="Calibri" pitchFamily="34" charset="-122"/>
+                <a:cs typeface="Calibri" pitchFamily="34" charset="-120"/>
+              </a:rPr>
+              <a:t>10  Amostra c/ gabarito + horas do especialista</a:t>
+            </a:r>
+            <a:endParaRPr lang="en-US" sz="840" dirty="0"/>
+          </a:p>
+        </p:txBody>
+      </p:sp>
+      <p:sp>
+        <p:nvSpPr>
+          <p:cNvPr id="40" name="Text 38"/>
+          <p:cNvSpPr/>
+          <p:nvPr/>
+        </p:nvSpPr>
+        <p:spPr>
+          <a:xfrm>
+            <a:off x="694944" y="8092440"/>
+            <a:ext cx="3113532" cy="228600"/>
+          </a:xfrm>
+          <a:prstGeom prst="rect">
+            <a:avLst/>
+          </a:prstGeom>
+          <a:noFill/>
+          <a:ln/>
+        </p:spPr>
+        <p:txBody>
+          <a:bodyPr wrap="square" lIns="0" tIns="0" rIns="0" bIns="0" rtlCol="0" anchor="ctr"/>
+          <a:lstStyle/>
+          <a:p>
+            <a:pPr indent="0" marL="0">
+              <a:buNone/>
+            </a:pPr>
+            <a:r>
+              <a:rPr lang="en-US" sz="840" dirty="0">
+                <a:solidFill>
+                  <a:srgbClr val="232B3A"/>
+                </a:solidFill>
+                <a:latin typeface="Calibri" pitchFamily="34" charset="0"/>
+                <a:ea typeface="Calibri" pitchFamily="34" charset="-122"/>
+                <a:cs typeface="Calibri" pitchFamily="34" charset="-120"/>
+              </a:rPr>
+              <a:t>5  O erro inaceitável, nomeado</a:t>
+            </a:r>
+            <a:endParaRPr lang="en-US" sz="840" dirty="0"/>
+          </a:p>
+        </p:txBody>
+      </p:sp>
+      <p:sp>
+        <p:nvSpPr>
+          <p:cNvPr id="41" name="Text 39"/>
+          <p:cNvSpPr/>
+          <p:nvPr/>
+        </p:nvSpPr>
+        <p:spPr>
+          <a:xfrm>
+            <a:off x="3899916" y="8092440"/>
+            <a:ext cx="3113532" cy="228600"/>
+          </a:xfrm>
+          <a:prstGeom prst="rect">
+            <a:avLst/>
+          </a:prstGeom>
+          <a:noFill/>
+          <a:ln/>
+        </p:spPr>
+        <p:txBody>
+          <a:bodyPr wrap="square" lIns="0" tIns="0" rIns="0" bIns="0" rtlCol="0" anchor="ctr"/>
+          <a:lstStyle/>
+          <a:p>
+            <a:pPr indent="0" marL="0">
+              <a:buNone/>
+            </a:pPr>
+            <a:r>
+              <a:rPr lang="en-US" sz="840" dirty="0">
+                <a:solidFill>
+                  <a:srgbClr val="232B3A"/>
+                </a:solidFill>
+                <a:latin typeface="Calibri" pitchFamily="34" charset="0"/>
+                <a:ea typeface="Calibri" pitchFamily="34" charset="-122"/>
+                <a:cs typeface="Calibri" pitchFamily="34" charset="-120"/>
+              </a:rPr>
+              <a:t>11  Usuário-chave + aprovador + ponto focal</a:t>
+            </a:r>
+            <a:endParaRPr lang="en-US" sz="840" dirty="0"/>
+          </a:p>
+        </p:txBody>
+      </p:sp>
+      <p:sp>
+        <p:nvSpPr>
+          <p:cNvPr id="42" name="Text 40"/>
+          <p:cNvSpPr/>
+          <p:nvPr/>
+        </p:nvSpPr>
+        <p:spPr>
+          <a:xfrm>
+            <a:off x="694944" y="8339328"/>
+            <a:ext cx="3113532" cy="228600"/>
+          </a:xfrm>
+          <a:prstGeom prst="rect">
+            <a:avLst/>
+          </a:prstGeom>
+          <a:noFill/>
+          <a:ln/>
+        </p:spPr>
+        <p:txBody>
+          <a:bodyPr wrap="square" lIns="0" tIns="0" rIns="0" bIns="0" rtlCol="0" anchor="ctr"/>
+          <a:lstStyle/>
+          <a:p>
+            <a:pPr indent="0" marL="0">
+              <a:buNone/>
+            </a:pPr>
+            <a:r>
+              <a:rPr lang="en-US" sz="840" dirty="0">
+                <a:solidFill>
+                  <a:srgbClr val="232B3A"/>
+                </a:solidFill>
+                <a:latin typeface="Calibri" pitchFamily="34" charset="0"/>
+                <a:ea typeface="Calibri" pitchFamily="34" charset="-122"/>
+                <a:cs typeface="Calibri" pitchFamily="34" charset="-120"/>
+              </a:rPr>
+              <a:t>6  O que o estagiário erraria (tácito)</a:t>
+            </a:r>
+            <a:endParaRPr lang="en-US" sz="840" dirty="0"/>
+          </a:p>
+        </p:txBody>
+      </p:sp>
+      <p:sp>
+        <p:nvSpPr>
+          <p:cNvPr id="43" name="Text 41"/>
+          <p:cNvSpPr/>
+          <p:nvPr/>
+        </p:nvSpPr>
+        <p:spPr>
+          <a:xfrm>
+            <a:off x="3899916" y="8339328"/>
+            <a:ext cx="3113532" cy="228600"/>
+          </a:xfrm>
+          <a:prstGeom prst="rect">
+            <a:avLst/>
+          </a:prstGeom>
+          <a:noFill/>
+          <a:ln/>
+        </p:spPr>
+        <p:txBody>
+          <a:bodyPr wrap="square" lIns="0" tIns="0" rIns="0" bIns="0" rtlCol="0" anchor="ctr"/>
+          <a:lstStyle/>
+          <a:p>
+            <a:pPr indent="0" marL="0">
+              <a:buNone/>
+            </a:pPr>
+            <a:r>
+              <a:rPr lang="en-US" sz="840" dirty="0">
+                <a:solidFill>
+                  <a:srgbClr val="232B3A"/>
+                </a:solidFill>
+                <a:latin typeface="Calibri" pitchFamily="34" charset="0"/>
+                <a:ea typeface="Calibri" pitchFamily="34" charset="-122"/>
+                <a:cs typeface="Calibri" pitchFamily="34" charset="-120"/>
+              </a:rPr>
+              <a:t>12  Dados podem sair? IA em nuvem ok?</a:t>
+            </a:r>
+            <a:endParaRPr lang="en-US" sz="840" dirty="0"/>
+          </a:p>
+        </p:txBody>
+      </p:sp>
+      <p:sp>
+        <p:nvSpPr>
+          <p:cNvPr id="44" name="Text 42"/>
+          <p:cNvSpPr/>
+          <p:nvPr/>
+        </p:nvSpPr>
+        <p:spPr>
+          <a:xfrm>
+            <a:off x="530352" y="8732520"/>
+            <a:ext cx="6501384" cy="201168"/>
+          </a:xfrm>
+          <a:prstGeom prst="rect">
+            <a:avLst/>
+          </a:prstGeom>
+          <a:noFill/>
+          <a:ln/>
+        </p:spPr>
+        <p:txBody>
+          <a:bodyPr wrap="square" lIns="0" tIns="0" rIns="0" bIns="0" rtlCol="0" anchor="ctr"/>
+          <a:lstStyle/>
+          <a:p>
+            <a:pPr indent="0" marL="0">
+              <a:buNone/>
+            </a:pPr>
+            <a:r>
+              <a:rPr lang="en-US" sz="850" b="1" spc="240" kern="0" dirty="0">
+                <a:solidFill>
+                  <a:srgbClr val="B8985A"/>
+                </a:solidFill>
+                <a:latin typeface="Calibri" pitchFamily="34" charset="0"/>
+                <a:ea typeface="Calibri" pitchFamily="34" charset="-122"/>
+                <a:cs typeface="Calibri" pitchFamily="34" charset="-120"/>
+              </a:rPr>
+              <a:t>SINAIS DE ALERTA — MUDAM A CONVERSA, NÃO MATAM A REUNIÃO</a:t>
+            </a:r>
+            <a:endParaRPr lang="en-US" sz="850" dirty="0"/>
+          </a:p>
+        </p:txBody>
+      </p:sp>
+      <p:sp>
+        <p:nvSpPr>
+          <p:cNvPr id="45" name="Text 43"/>
+          <p:cNvSpPr/>
+          <p:nvPr/>
+        </p:nvSpPr>
+        <p:spPr>
+          <a:xfrm>
+            <a:off x="530352" y="8951976"/>
+            <a:ext cx="6501384" cy="749808"/>
+          </a:xfrm>
+          <a:prstGeom prst="rect">
+            <a:avLst/>
+          </a:prstGeom>
+          <a:noFill/>
+          <a:ln/>
+        </p:spPr>
+        <p:txBody>
+          <a:bodyPr wrap="square" lIns="0" tIns="0" rIns="0" bIns="0" rtlCol="0" anchor="ctr"/>
+          <a:lstStyle/>
+          <a:p>
+            <a:pPr indent="0" marL="0">
+              <a:lnSpc>
+                <a:spcPts val="1150"/>
+              </a:lnSpc>
+              <a:buNone/>
+            </a:pPr>
+            <a:r>
+              <a:rPr lang="en-US" sz="840" dirty="0">
+                <a:solidFill>
+                  <a:srgbClr val="232B3A"/>
+                </a:solidFill>
+                <a:latin typeface="Calibri" pitchFamily="34" charset="0"/>
+                <a:ea typeface="Calibri" pitchFamily="34" charset="-122"/>
+                <a:cs typeface="Calibri" pitchFamily="34" charset="-120"/>
+              </a:rPr>
+              <a:t>Sem dado acessível → protótipo começa capturando o dado · Sem número → 1ª semana mede o hoje · “Automatizar tudo” → “tudo começa por um. Qual?” · Conhecimento todo na cabeça de um → sessões de extração antes do desenho · Especialista sem tempo → cronograma é ficção; renegociar · Erro inaceitável em tudo → nasce com aprovação humana em tudo, e a autonomia cresce com a confiança medida · Dado preso + sem infra → desenho especial, sem prazo na hora.</a:t>
+            </a:r>
+            <a:endParaRPr lang="en-US" sz="840" dirty="0"/>
+          </a:p>
+        </p:txBody>
+      </p:sp>
+      <p:sp>
+        <p:nvSpPr>
+          <p:cNvPr id="46" name="Text 44"/>
+          <p:cNvSpPr/>
+          <p:nvPr/>
+        </p:nvSpPr>
+        <p:spPr>
+          <a:xfrm>
+            <a:off x="530352" y="9738360"/>
+            <a:ext cx="6501384" cy="237744"/>
+          </a:xfrm>
+          <a:prstGeom prst="rect">
+            <a:avLst/>
+          </a:prstGeom>
+          <a:noFill/>
+          <a:ln/>
+        </p:spPr>
+        <p:txBody>
+          <a:bodyPr wrap="square" lIns="0" tIns="0" rIns="0" bIns="0" rtlCol="0" anchor="ctr"/>
+          <a:lstStyle/>
+          <a:p>
+            <a:pPr indent="0" marL="0">
+              <a:buNone/>
+            </a:pPr>
+            <a:r>
+              <a:rPr lang="en-US" sz="900" i="1" dirty="0">
+                <a:solidFill>
+                  <a:srgbClr val="B8985A"/>
+                </a:solidFill>
+                <a:latin typeface="Cambria" pitchFamily="34" charset="0"/>
+                <a:ea typeface="Cambria" pitchFamily="34" charset="-122"/>
+                <a:cs typeface="Cambria" pitchFamily="34" charset="-120"/>
+              </a:rPr>
+              <a:t>Mesmo dia: registro dos 7 blocos ao time — o que faltar vira pergunta ao ponto focal, não segunda reunião.</a:t>
+            </a:r>
+            <a:endParaRPr lang="en-US" sz="900" dirty="0"/>
+          </a:p>
+        </p:txBody>
+      </p:sp>
+      <p:sp>
+        <p:nvSpPr>
+          <p:cNvPr id="47" name="Shape 45"/>
+          <p:cNvSpPr/>
+          <p:nvPr/>
+        </p:nvSpPr>
+        <p:spPr>
+          <a:xfrm>
+            <a:off x="530352" y="10259568"/>
+            <a:ext cx="6501384" cy="0"/>
+          </a:xfrm>
+          <a:prstGeom prst="line">
+            <a:avLst/>
+          </a:prstGeom>
+          <a:noFill/>
+          <a:ln w="9525">
+            <a:solidFill>
+              <a:srgbClr val="D9D2C4"/>
+            </a:solidFill>
+            <a:prstDash val="solid"/>
+          </a:ln>
+        </p:spPr>
+      </p:sp>
+      <p:sp>
+        <p:nvSpPr>
+          <p:cNvPr id="48" name="Text 46"/>
+          <p:cNvSpPr/>
+          <p:nvPr/>
+        </p:nvSpPr>
+        <p:spPr>
+          <a:xfrm>
+            <a:off x="530352" y="10332720"/>
             <a:ext cx="4754880" cy="182880"/>
           </a:xfrm>
           <a:prstGeom prst="rect">
@@ -4339,13 +5005,13 @@
       </p:sp>
       <p:sp>
         <p:nvSpPr>
-          <p:cNvPr id="39" name="Text 37"/>
-          <p:cNvSpPr/>
-          <p:nvPr/>
-        </p:nvSpPr>
-        <p:spPr>
-          <a:xfrm>
-            <a:off x="5166360" y="10314432"/>
+          <p:cNvPr id="49" name="Text 47"/>
+          <p:cNvSpPr/>
+          <p:nvPr/>
+        </p:nvSpPr>
+        <p:spPr>
+          <a:xfrm>
+            <a:off x="5202936" y="10332720"/>
             <a:ext cx="1828800" cy="182880"/>
           </a:xfrm>
           <a:prstGeom prst="rect">
